--- a/DDD_Presentacion.pptx
+++ b/DDD_Presentacion.pptx
@@ -5,7 +5,7 @@
     <p:sldMasterId id="2147483648" r:id="rId1"/>
   </p:sldMasterIdLst>
   <p:notesMasterIdLst>
-    <p:notesMasterId r:id="rId15"/>
+    <p:notesMasterId r:id="rId18"/>
   </p:notesMasterIdLst>
   <p:sldIdLst>
     <p:sldId id="256" r:id="rId2"/>
@@ -17,10 +17,13 @@
     <p:sldId id="262" r:id="rId8"/>
     <p:sldId id="263" r:id="rId9"/>
     <p:sldId id="264" r:id="rId10"/>
-    <p:sldId id="265" r:id="rId11"/>
-    <p:sldId id="266" r:id="rId12"/>
-    <p:sldId id="267" r:id="rId13"/>
-    <p:sldId id="268" r:id="rId14"/>
+    <p:sldId id="271" r:id="rId11"/>
+    <p:sldId id="269" r:id="rId12"/>
+    <p:sldId id="265" r:id="rId13"/>
+    <p:sldId id="266" r:id="rId14"/>
+    <p:sldId id="270" r:id="rId15"/>
+    <p:sldId id="267" r:id="rId16"/>
+    <p:sldId id="268" r:id="rId17"/>
   </p:sldIdLst>
   <p:sldSz cx="12192000" cy="6858000"/>
   <p:notesSz cx="6858000" cy="9144000"/>
@@ -209,7 +212,7 @@
           <a:p>
             <a:fld id="{B882E675-7021-4F26-B860-F5A6F1486E60}" type="datetimeFigureOut">
               <a:rPr lang="es-ES" smtClean="0"/>
-              <a:t>22/04/2026</a:t>
+              <a:t>23/04/2026</a:t>
             </a:fld>
             <a:endParaRPr lang="es-ES"/>
           </a:p>
@@ -504,6 +507,13 @@
           </p:nvPr>
         </p:nvSpPr>
         <p:spPr/>
+        <p:txBody>
+          <a:bodyPr/>
+          <a:lstStyle/>
+          <a:p>
+            <a:endParaRPr lang="es-ES"/>
+          </a:p>
+        </p:txBody>
       </p:sp>
       <p:sp>
         <p:nvSpPr>
@@ -541,7 +551,7 @@
           <a:p>
             <a:fld id="{972B6C61-10A8-43F1-922B-773DAD8B2471}" type="slidenum">
               <a:rPr lang="es-ES" smtClean="0"/>
-              <a:t>5</a:t>
+              <a:t>2</a:t>
             </a:fld>
             <a:endParaRPr lang="es-ES"/>
           </a:p>
@@ -550,7 +560,7 @@
     </p:spTree>
     <p:extLst>
       <p:ext uri="{BB962C8B-B14F-4D97-AF65-F5344CB8AC3E}">
-        <p14:creationId xmlns:p14="http://schemas.microsoft.com/office/powerpoint/2010/main" val="4291764058"/>
+        <p14:creationId xmlns:p14="http://schemas.microsoft.com/office/powerpoint/2010/main" val="832012484"/>
       </p:ext>
     </p:extLst>
   </p:cSld>
@@ -588,6 +598,13 @@
           </p:nvPr>
         </p:nvSpPr>
         <p:spPr/>
+        <p:txBody>
+          <a:bodyPr/>
+          <a:lstStyle/>
+          <a:p>
+            <a:endParaRPr lang="es-ES"/>
+          </a:p>
+        </p:txBody>
       </p:sp>
       <p:sp>
         <p:nvSpPr>
@@ -625,7 +642,7 @@
           <a:p>
             <a:fld id="{972B6C61-10A8-43F1-922B-773DAD8B2471}" type="slidenum">
               <a:rPr lang="es-ES" smtClean="0"/>
-              <a:t>6</a:t>
+              <a:t>5</a:t>
             </a:fld>
             <a:endParaRPr lang="es-ES"/>
           </a:p>
@@ -634,7 +651,7 @@
     </p:spTree>
     <p:extLst>
       <p:ext uri="{BB962C8B-B14F-4D97-AF65-F5344CB8AC3E}">
-        <p14:creationId xmlns:p14="http://schemas.microsoft.com/office/powerpoint/2010/main" val="3814128339"/>
+        <p14:creationId xmlns:p14="http://schemas.microsoft.com/office/powerpoint/2010/main" val="4291764058"/>
       </p:ext>
     </p:extLst>
   </p:cSld>
@@ -672,6 +689,13 @@
           </p:nvPr>
         </p:nvSpPr>
         <p:spPr/>
+        <p:txBody>
+          <a:bodyPr/>
+          <a:lstStyle/>
+          <a:p>
+            <a:endParaRPr lang="es-ES"/>
+          </a:p>
+        </p:txBody>
       </p:sp>
       <p:sp>
         <p:nvSpPr>
@@ -709,7 +733,98 @@
           <a:p>
             <a:fld id="{972B6C61-10A8-43F1-922B-773DAD8B2471}" type="slidenum">
               <a:rPr lang="es-ES" smtClean="0"/>
-              <a:t>13</a:t>
+              <a:t>6</a:t>
+            </a:fld>
+            <a:endParaRPr lang="es-ES"/>
+          </a:p>
+        </p:txBody>
+      </p:sp>
+    </p:spTree>
+    <p:extLst>
+      <p:ext uri="{BB962C8B-B14F-4D97-AF65-F5344CB8AC3E}">
+        <p14:creationId xmlns:p14="http://schemas.microsoft.com/office/powerpoint/2010/main" val="3814128339"/>
+      </p:ext>
+    </p:extLst>
+  </p:cSld>
+  <p:clrMapOvr>
+    <a:masterClrMapping/>
+  </p:clrMapOvr>
+</p:notes>
+</file>
+
+<file path=ppt/notesSlides/notesSlide4.xml><?xml version="1.0" encoding="utf-8"?>
+<p:notes xmlns:a="http://schemas.openxmlformats.org/drawingml/2006/main" xmlns:r="http://schemas.openxmlformats.org/officeDocument/2006/relationships" xmlns:p="http://schemas.openxmlformats.org/presentationml/2006/main">
+  <p:cSld>
+    <p:spTree>
+      <p:nvGrpSpPr>
+        <p:cNvPr id="1" name=""/>
+        <p:cNvGrpSpPr/>
+        <p:nvPr/>
+      </p:nvGrpSpPr>
+      <p:grpSpPr>
+        <a:xfrm>
+          <a:off x="0" y="0"/>
+          <a:ext cx="0" cy="0"/>
+          <a:chOff x="0" y="0"/>
+          <a:chExt cx="0" cy="0"/>
+        </a:xfrm>
+      </p:grpSpPr>
+      <p:sp>
+        <p:nvSpPr>
+          <p:cNvPr id="2" name="Marcador de imagen de diapositiva 1"/>
+          <p:cNvSpPr>
+            <a:spLocks noGrp="1" noRot="1" noChangeAspect="1"/>
+          </p:cNvSpPr>
+          <p:nvPr>
+            <p:ph type="sldImg"/>
+          </p:nvPr>
+        </p:nvSpPr>
+        <p:spPr/>
+        <p:txBody>
+          <a:bodyPr/>
+          <a:lstStyle/>
+          <a:p>
+            <a:endParaRPr lang="es-ES"/>
+          </a:p>
+        </p:txBody>
+      </p:sp>
+      <p:sp>
+        <p:nvSpPr>
+          <p:cNvPr id="3" name="Marcador de notas 2"/>
+          <p:cNvSpPr>
+            <a:spLocks noGrp="1"/>
+          </p:cNvSpPr>
+          <p:nvPr>
+            <p:ph type="body" idx="1"/>
+          </p:nvPr>
+        </p:nvSpPr>
+        <p:spPr/>
+        <p:txBody>
+          <a:bodyPr/>
+          <a:lstStyle/>
+          <a:p>
+            <a:endParaRPr lang="es-ES" dirty="0"/>
+          </a:p>
+        </p:txBody>
+      </p:sp>
+      <p:sp>
+        <p:nvSpPr>
+          <p:cNvPr id="4" name="Marcador de número de diapositiva 3"/>
+          <p:cNvSpPr>
+            <a:spLocks noGrp="1"/>
+          </p:cNvSpPr>
+          <p:nvPr>
+            <p:ph type="sldNum" sz="quarter" idx="5"/>
+          </p:nvPr>
+        </p:nvSpPr>
+        <p:spPr/>
+        <p:txBody>
+          <a:bodyPr/>
+          <a:lstStyle/>
+          <a:p>
+            <a:fld id="{972B6C61-10A8-43F1-922B-773DAD8B2471}" type="slidenum">
+              <a:rPr lang="es-ES" smtClean="0"/>
+              <a:t>16</a:t>
             </a:fld>
             <a:endParaRPr lang="es-ES"/>
           </a:p>
@@ -875,7 +990,7 @@
           <a:p>
             <a:fld id="{B35F5CB6-7A71-4D37-B568-AF7E20826781}" type="datetimeFigureOut">
               <a:rPr lang="es-ES" smtClean="0"/>
-              <a:t>22/04/2026</a:t>
+              <a:t>23/04/2026</a:t>
             </a:fld>
             <a:endParaRPr lang="es-ES"/>
           </a:p>
@@ -1073,7 +1188,7 @@
           <a:p>
             <a:fld id="{B35F5CB6-7A71-4D37-B568-AF7E20826781}" type="datetimeFigureOut">
               <a:rPr lang="es-ES" smtClean="0"/>
-              <a:t>22/04/2026</a:t>
+              <a:t>23/04/2026</a:t>
             </a:fld>
             <a:endParaRPr lang="es-ES"/>
           </a:p>
@@ -1281,7 +1396,7 @@
           <a:p>
             <a:fld id="{B35F5CB6-7A71-4D37-B568-AF7E20826781}" type="datetimeFigureOut">
               <a:rPr lang="es-ES" smtClean="0"/>
-              <a:t>22/04/2026</a:t>
+              <a:t>23/04/2026</a:t>
             </a:fld>
             <a:endParaRPr lang="es-ES"/>
           </a:p>
@@ -1479,7 +1594,7 @@
           <a:p>
             <a:fld id="{B35F5CB6-7A71-4D37-B568-AF7E20826781}" type="datetimeFigureOut">
               <a:rPr lang="es-ES" smtClean="0"/>
-              <a:t>22/04/2026</a:t>
+              <a:t>23/04/2026</a:t>
             </a:fld>
             <a:endParaRPr lang="es-ES"/>
           </a:p>
@@ -1754,7 +1869,7 @@
           <a:p>
             <a:fld id="{B35F5CB6-7A71-4D37-B568-AF7E20826781}" type="datetimeFigureOut">
               <a:rPr lang="es-ES" smtClean="0"/>
-              <a:t>22/04/2026</a:t>
+              <a:t>23/04/2026</a:t>
             </a:fld>
             <a:endParaRPr lang="es-ES"/>
           </a:p>
@@ -2019,7 +2134,7 @@
           <a:p>
             <a:fld id="{B35F5CB6-7A71-4D37-B568-AF7E20826781}" type="datetimeFigureOut">
               <a:rPr lang="es-ES" smtClean="0"/>
-              <a:t>22/04/2026</a:t>
+              <a:t>23/04/2026</a:t>
             </a:fld>
             <a:endParaRPr lang="es-ES"/>
           </a:p>
@@ -2431,7 +2546,7 @@
           <a:p>
             <a:fld id="{B35F5CB6-7A71-4D37-B568-AF7E20826781}" type="datetimeFigureOut">
               <a:rPr lang="es-ES" smtClean="0"/>
-              <a:t>22/04/2026</a:t>
+              <a:t>23/04/2026</a:t>
             </a:fld>
             <a:endParaRPr lang="es-ES"/>
           </a:p>
@@ -2572,7 +2687,7 @@
           <a:p>
             <a:fld id="{B35F5CB6-7A71-4D37-B568-AF7E20826781}" type="datetimeFigureOut">
               <a:rPr lang="es-ES" smtClean="0"/>
-              <a:t>22/04/2026</a:t>
+              <a:t>23/04/2026</a:t>
             </a:fld>
             <a:endParaRPr lang="es-ES"/>
           </a:p>
@@ -2685,7 +2800,7 @@
           <a:p>
             <a:fld id="{B35F5CB6-7A71-4D37-B568-AF7E20826781}" type="datetimeFigureOut">
               <a:rPr lang="es-ES" smtClean="0"/>
-              <a:t>22/04/2026</a:t>
+              <a:t>23/04/2026</a:t>
             </a:fld>
             <a:endParaRPr lang="es-ES"/>
           </a:p>
@@ -2996,7 +3111,7 @@
           <a:p>
             <a:fld id="{B35F5CB6-7A71-4D37-B568-AF7E20826781}" type="datetimeFigureOut">
               <a:rPr lang="es-ES" smtClean="0"/>
-              <a:t>22/04/2026</a:t>
+              <a:t>23/04/2026</a:t>
             </a:fld>
             <a:endParaRPr lang="es-ES"/>
           </a:p>
@@ -3284,7 +3399,7 @@
           <a:p>
             <a:fld id="{B35F5CB6-7A71-4D37-B568-AF7E20826781}" type="datetimeFigureOut">
               <a:rPr lang="es-ES" smtClean="0"/>
-              <a:t>22/04/2026</a:t>
+              <a:t>23/04/2026</a:t>
             </a:fld>
             <a:endParaRPr lang="es-ES"/>
           </a:p>
@@ -3525,7 +3640,7 @@
           <a:p>
             <a:fld id="{B35F5CB6-7A71-4D37-B568-AF7E20826781}" type="datetimeFigureOut">
               <a:rPr lang="es-ES" smtClean="0"/>
-              <a:t>22/04/2026</a:t>
+              <a:t>23/04/2026</a:t>
             </a:fld>
             <a:endParaRPr lang="es-ES"/>
           </a:p>
@@ -4196,7 +4311,13 @@
     </p:bg>
     <p:spTree>
       <p:nvGrpSpPr>
-        <p:cNvPr id="1" name=""/>
+        <p:cNvPr id="1" name="">
+          <a:extLst>
+            <a:ext uri="{FF2B5EF4-FFF2-40B4-BE49-F238E27FC236}">
+              <a16:creationId xmlns:a16="http://schemas.microsoft.com/office/drawing/2014/main" id="{884D8CB5-4C5B-D789-CC55-B0B0D9A223CC}"/>
+            </a:ext>
+          </a:extLst>
+        </p:cNvPr>
         <p:cNvGrpSpPr/>
         <p:nvPr/>
       </p:nvGrpSpPr>
@@ -4213,7 +4334,7 @@
           <p:cNvPr id="2" name="CuadroTexto 1">
             <a:extLst>
               <a:ext uri="{FF2B5EF4-FFF2-40B4-BE49-F238E27FC236}">
-                <a16:creationId xmlns:a16="http://schemas.microsoft.com/office/drawing/2014/main" id="{68EEC4E5-C84F-ADCA-230D-B82B2F0FD60B}"/>
+                <a16:creationId xmlns:a16="http://schemas.microsoft.com/office/drawing/2014/main" id="{F0629697-813D-CB84-2E4F-715F4C4C2E30}"/>
               </a:ext>
             </a:extLst>
           </p:cNvPr>
@@ -4237,12 +4358,28 @@
           <a:lstStyle/>
           <a:p>
             <a:r>
-              <a:rPr lang="es-ES" sz="2800" b="1" noProof="0" dirty="0">
+              <a:rPr lang="es-ES" sz="3000" b="1" noProof="0" dirty="0">
                 <a:solidFill>
                   <a:srgbClr val="172554"/>
                 </a:solidFill>
               </a:rPr>
-              <a:t>Servicios de Dominio vs Aplicación</a:t>
+              <a:t>Agregados (</a:t>
+            </a:r>
+            <a:r>
+              <a:rPr lang="es-ES" sz="3000" b="1" noProof="0" dirty="0" err="1">
+                <a:solidFill>
+                  <a:srgbClr val="172554"/>
+                </a:solidFill>
+              </a:rPr>
+              <a:t>Aggregates</a:t>
+            </a:r>
+            <a:r>
+              <a:rPr lang="es-ES" sz="3000" b="1" noProof="0" dirty="0">
+                <a:solidFill>
+                  <a:srgbClr val="172554"/>
+                </a:solidFill>
+              </a:rPr>
+              <a:t>)</a:t>
             </a:r>
           </a:p>
         </p:txBody>
@@ -4252,7 +4389,7 @@
           <p:cNvPr id="3" name="Rectángulo 2">
             <a:extLst>
               <a:ext uri="{FF2B5EF4-FFF2-40B4-BE49-F238E27FC236}">
-                <a16:creationId xmlns:a16="http://schemas.microsoft.com/office/drawing/2014/main" id="{D017AD27-340A-17F0-EFE4-E3465E3F2049}"/>
+                <a16:creationId xmlns:a16="http://schemas.microsoft.com/office/drawing/2014/main" id="{AEE3DD9F-AF47-FB2A-0E23-0E86DB3F4123}"/>
               </a:ext>
             </a:extLst>
           </p:cNvPr>
@@ -4261,8 +4398,8 @@
         </p:nvSpPr>
         <p:spPr>
           <a:xfrm flipV="1">
-            <a:off x="762000" y="950976"/>
-            <a:ext cx="5794248" cy="65024"/>
+            <a:off x="762000" y="970281"/>
+            <a:ext cx="4376928" cy="45719"/>
           </a:xfrm>
           <a:prstGeom prst="rect">
             <a:avLst/>
@@ -4317,10 +4454,303 @@
       </p:sp>
       <p:sp>
         <p:nvSpPr>
-          <p:cNvPr id="4" name="Rectángulo 3">
-            <a:extLst>
-              <a:ext uri="{FF2B5EF4-FFF2-40B4-BE49-F238E27FC236}">
-                <a16:creationId xmlns:a16="http://schemas.microsoft.com/office/drawing/2014/main" id="{8E27366D-8D87-06A2-14E0-58807D555D5C}"/>
+          <p:cNvPr id="5" name="CuadroTexto 4">
+            <a:extLst>
+              <a:ext uri="{FF2B5EF4-FFF2-40B4-BE49-F238E27FC236}">
+                <a16:creationId xmlns:a16="http://schemas.microsoft.com/office/drawing/2014/main" id="{74FF6CCC-56A7-2A2F-5FDD-E5BB000F77BB}"/>
+              </a:ext>
+            </a:extLst>
+          </p:cNvPr>
+          <p:cNvSpPr txBox="1"/>
+          <p:nvPr/>
+        </p:nvSpPr>
+        <p:spPr>
+          <a:xfrm>
+            <a:off x="678873" y="1659080"/>
+            <a:ext cx="10668000" cy="381000"/>
+          </a:xfrm>
+          <a:prstGeom prst="rect">
+            <a:avLst/>
+          </a:prstGeom>
+          <a:noFill/>
+        </p:spPr>
+        <p:txBody>
+          <a:bodyPr vert="horz" wrap="square" rtlCol="0">
+            <a:noAutofit/>
+          </a:bodyPr>
+          <a:lstStyle/>
+          <a:p>
+            <a:r>
+              <a:rPr lang="es-ES" b="1" noProof="0" dirty="0">
+                <a:solidFill>
+                  <a:srgbClr val="172554"/>
+                </a:solidFill>
+              </a:rPr>
+              <a:t>La Raíz del Agregado:</a:t>
+            </a:r>
+          </a:p>
+        </p:txBody>
+      </p:sp>
+      <p:sp>
+        <p:nvSpPr>
+          <p:cNvPr id="6" name="CuadroTexto 5">
+            <a:extLst>
+              <a:ext uri="{FF2B5EF4-FFF2-40B4-BE49-F238E27FC236}">
+                <a16:creationId xmlns:a16="http://schemas.microsoft.com/office/drawing/2014/main" id="{8AD25C0D-6393-80ED-950F-49D49D2F3A42}"/>
+              </a:ext>
+            </a:extLst>
+          </p:cNvPr>
+          <p:cNvSpPr txBox="1"/>
+          <p:nvPr/>
+        </p:nvSpPr>
+        <p:spPr>
+          <a:xfrm>
+            <a:off x="678873" y="2103580"/>
+            <a:ext cx="10668000" cy="1295400"/>
+          </a:xfrm>
+          <a:prstGeom prst="rect">
+            <a:avLst/>
+          </a:prstGeom>
+          <a:noFill/>
+        </p:spPr>
+        <p:txBody>
+          <a:bodyPr vert="horz" wrap="square" rtlCol="0">
+            <a:noAutofit/>
+          </a:bodyPr>
+          <a:lstStyle/>
+          <a:p>
+            <a:pPr indent="-285750">
+              <a:spcAft>
+                <a:spcPts val="600"/>
+              </a:spcAft>
+              <a:buChar char="•"/>
+            </a:pPr>
+            <a:r>
+              <a:rPr lang="es-ES" sz="1500" noProof="0" dirty="0">
+                <a:solidFill>
+                  <a:srgbClr val="374151"/>
+                </a:solidFill>
+              </a:rPr>
+              <a:t>Es el único objeto que otros objetos externos pueden referenciar directamente</a:t>
+            </a:r>
+          </a:p>
+          <a:p>
+            <a:pPr indent="-285750">
+              <a:spcAft>
+                <a:spcPts val="600"/>
+              </a:spcAft>
+              <a:buChar char="•"/>
+            </a:pPr>
+            <a:r>
+              <a:rPr lang="es-ES" sz="1500" noProof="0" dirty="0">
+                <a:solidFill>
+                  <a:srgbClr val="374151"/>
+                </a:solidFill>
+              </a:rPr>
+              <a:t>Controla la creación y modificación de los objetos internos</a:t>
+            </a:r>
+          </a:p>
+          <a:p>
+            <a:pPr indent="-285750">
+              <a:spcAft>
+                <a:spcPts val="600"/>
+              </a:spcAft>
+              <a:buChar char="•"/>
+            </a:pPr>
+            <a:r>
+              <a:rPr lang="es-ES" sz="1500" noProof="0" dirty="0">
+                <a:solidFill>
+                  <a:srgbClr val="374151"/>
+                </a:solidFill>
+              </a:rPr>
+              <a:t>Garantiza que el estado del conjunto siga siendo válido</a:t>
+            </a:r>
+          </a:p>
+          <a:p>
+            <a:pPr indent="-285750">
+              <a:spcAft>
+                <a:spcPts val="600"/>
+              </a:spcAft>
+              <a:buChar char="•"/>
+            </a:pPr>
+            <a:r>
+              <a:rPr lang="es-ES" sz="1500" noProof="0" dirty="0">
+                <a:solidFill>
+                  <a:srgbClr val="374151"/>
+                </a:solidFill>
+              </a:rPr>
+              <a:t>Sirve como frontera transaccional: Se guarda y carga como unidad</a:t>
+            </a:r>
+          </a:p>
+        </p:txBody>
+      </p:sp>
+      <p:sp>
+        <p:nvSpPr>
+          <p:cNvPr id="7" name="CuadroTexto 6">
+            <a:extLst>
+              <a:ext uri="{FF2B5EF4-FFF2-40B4-BE49-F238E27FC236}">
+                <a16:creationId xmlns:a16="http://schemas.microsoft.com/office/drawing/2014/main" id="{EC1027A3-9790-F727-D01B-36AC4CE40E6E}"/>
+              </a:ext>
+            </a:extLst>
+          </p:cNvPr>
+          <p:cNvSpPr txBox="1"/>
+          <p:nvPr/>
+        </p:nvSpPr>
+        <p:spPr>
+          <a:xfrm>
+            <a:off x="678873" y="3460173"/>
+            <a:ext cx="10668000" cy="381000"/>
+          </a:xfrm>
+          <a:prstGeom prst="rect">
+            <a:avLst/>
+          </a:prstGeom>
+          <a:noFill/>
+        </p:spPr>
+        <p:txBody>
+          <a:bodyPr vert="horz" wrap="square" rtlCol="0">
+            <a:noAutofit/>
+          </a:bodyPr>
+          <a:lstStyle/>
+          <a:p>
+            <a:r>
+              <a:rPr lang="es-ES" sz="1600" b="1" noProof="0" dirty="0">
+                <a:solidFill>
+                  <a:srgbClr val="172554"/>
+                </a:solidFill>
+              </a:rPr>
+              <a:t>Ejemplo:</a:t>
+            </a:r>
+          </a:p>
+        </p:txBody>
+      </p:sp>
+      <p:sp>
+        <p:nvSpPr>
+          <p:cNvPr id="8" name="CuadroTexto 7">
+            <a:extLst>
+              <a:ext uri="{FF2B5EF4-FFF2-40B4-BE49-F238E27FC236}">
+                <a16:creationId xmlns:a16="http://schemas.microsoft.com/office/drawing/2014/main" id="{8150936F-9075-9E3E-D3BE-4FAC2EEF1D58}"/>
+              </a:ext>
+            </a:extLst>
+          </p:cNvPr>
+          <p:cNvSpPr txBox="1"/>
+          <p:nvPr/>
+        </p:nvSpPr>
+        <p:spPr>
+          <a:xfrm>
+            <a:off x="678873" y="3904673"/>
+            <a:ext cx="10668000" cy="369332"/>
+          </a:xfrm>
+          <a:prstGeom prst="rect">
+            <a:avLst/>
+          </a:prstGeom>
+          <a:noFill/>
+        </p:spPr>
+        <p:txBody>
+          <a:bodyPr vert="horz" wrap="square" rtlCol="0">
+            <a:noAutofit/>
+          </a:bodyPr>
+          <a:lstStyle/>
+          <a:p>
+            <a:r>
+              <a:rPr lang="es-ES" sz="1400" noProof="0" dirty="0">
+                <a:solidFill>
+                  <a:srgbClr val="6B7280"/>
+                </a:solidFill>
+              </a:rPr>
+              <a:t>Un Pedido con líneas, dirección de envío y descuentos. Desde fuera se usan métodos como AgregarLinea o CambiarDireccion.</a:t>
+            </a:r>
+          </a:p>
+        </p:txBody>
+      </p:sp>
+    </p:spTree>
+    <p:extLst>
+      <p:ext uri="{BB962C8B-B14F-4D97-AF65-F5344CB8AC3E}">
+        <p14:creationId xmlns:p14="http://schemas.microsoft.com/office/powerpoint/2010/main" val="3341463376"/>
+      </p:ext>
+    </p:extLst>
+  </p:cSld>
+  <p:clrMapOvr>
+    <a:masterClrMapping/>
+  </p:clrMapOvr>
+</p:sld>
+</file>
+
+<file path=ppt/slides/slide11.xml><?xml version="1.0" encoding="utf-8"?>
+<p:sld xmlns:a="http://schemas.openxmlformats.org/drawingml/2006/main" xmlns:r="http://schemas.openxmlformats.org/officeDocument/2006/relationships" xmlns:p="http://schemas.openxmlformats.org/presentationml/2006/main">
+  <p:cSld>
+    <p:bg>
+      <p:bgPr>
+        <a:solidFill>
+          <a:srgbClr val="FFFFFF"/>
+        </a:solidFill>
+        <a:effectLst/>
+      </p:bgPr>
+    </p:bg>
+    <p:spTree>
+      <p:nvGrpSpPr>
+        <p:cNvPr id="1" name="">
+          <a:extLst>
+            <a:ext uri="{FF2B5EF4-FFF2-40B4-BE49-F238E27FC236}">
+              <a16:creationId xmlns:a16="http://schemas.microsoft.com/office/drawing/2014/main" id="{EB56987A-5273-5F19-66AF-444E696B5AD2}"/>
+            </a:ext>
+          </a:extLst>
+        </p:cNvPr>
+        <p:cNvGrpSpPr/>
+        <p:nvPr/>
+      </p:nvGrpSpPr>
+      <p:grpSpPr>
+        <a:xfrm>
+          <a:off x="0" y="0"/>
+          <a:ext cx="0" cy="0"/>
+          <a:chOff x="0" y="0"/>
+          <a:chExt cx="0" cy="0"/>
+        </a:xfrm>
+      </p:grpSpPr>
+      <p:sp>
+        <p:nvSpPr>
+          <p:cNvPr id="2" name="CuadroTexto 1">
+            <a:extLst>
+              <a:ext uri="{FF2B5EF4-FFF2-40B4-BE49-F238E27FC236}">
+                <a16:creationId xmlns:a16="http://schemas.microsoft.com/office/drawing/2014/main" id="{2FBE5410-5C49-70E4-9E1D-CE9D51B88C5D}"/>
+              </a:ext>
+            </a:extLst>
+          </p:cNvPr>
+          <p:cNvSpPr txBox="1"/>
+          <p:nvPr/>
+        </p:nvSpPr>
+        <p:spPr>
+          <a:xfrm>
+            <a:off x="762000" y="381000"/>
+            <a:ext cx="10668000" cy="369332"/>
+          </a:xfrm>
+          <a:prstGeom prst="rect">
+            <a:avLst/>
+          </a:prstGeom>
+          <a:noFill/>
+        </p:spPr>
+        <p:txBody>
+          <a:bodyPr vert="horz" wrap="square" rtlCol="0">
+            <a:noAutofit/>
+          </a:bodyPr>
+          <a:lstStyle/>
+          <a:p>
+            <a:r>
+              <a:rPr lang="es-ES" sz="3000" b="1" noProof="0" dirty="0">
+                <a:solidFill>
+                  <a:srgbClr val="172554"/>
+                </a:solidFill>
+              </a:rPr>
+              <a:t>Servicios de Dominio</a:t>
+            </a:r>
+          </a:p>
+        </p:txBody>
+      </p:sp>
+      <p:sp>
+        <p:nvSpPr>
+          <p:cNvPr id="3" name="Rectángulo 2">
+            <a:extLst>
+              <a:ext uri="{FF2B5EF4-FFF2-40B4-BE49-F238E27FC236}">
+                <a16:creationId xmlns:a16="http://schemas.microsoft.com/office/drawing/2014/main" id="{6E775F25-7AC7-4EFE-D1CF-39AF554D668C}"/>
               </a:ext>
             </a:extLst>
           </p:cNvPr>
@@ -4328,15 +4758,15 @@
           <p:nvPr/>
         </p:nvSpPr>
         <p:spPr>
-          <a:xfrm>
-            <a:off x="762000" y="1270000"/>
-            <a:ext cx="5207000" cy="381000"/>
+          <a:xfrm flipV="1">
+            <a:off x="762000" y="940832"/>
+            <a:ext cx="3810000" cy="75168"/>
           </a:xfrm>
           <a:prstGeom prst="rect">
             <a:avLst/>
           </a:prstGeom>
           <a:solidFill>
-            <a:srgbClr val="7C3AED"/>
+            <a:srgbClr val="2563EB"/>
           </a:solidFill>
           <a:ln w="19050" cap="flat" cmpd="sng" algn="ctr">
             <a:noFill/>
@@ -4379,23 +4809,16 @@
           <a:lstStyle/>
           <a:p>
             <a:pPr algn="ctr"/>
-            <a:r>
-              <a:rPr lang="es-ES" sz="1400" b="1" noProof="0" dirty="0">
-                <a:solidFill>
-                  <a:srgbClr val="FFFFFF"/>
-                </a:solidFill>
-              </a:rPr>
-              <a:t>Servicio de Dominio</a:t>
-            </a:r>
-          </a:p>
-        </p:txBody>
-      </p:sp>
-      <p:sp>
-        <p:nvSpPr>
-          <p:cNvPr id="5" name="CuadroTexto 4">
-            <a:extLst>
-              <a:ext uri="{FF2B5EF4-FFF2-40B4-BE49-F238E27FC236}">
-                <a16:creationId xmlns:a16="http://schemas.microsoft.com/office/drawing/2014/main" id="{3E8AB3C1-725C-A4E9-FBF3-C5195E567FD2}"/>
+            <a:endParaRPr lang="es-ES" noProof="0" dirty="0"/>
+          </a:p>
+        </p:txBody>
+      </p:sp>
+      <p:sp>
+        <p:nvSpPr>
+          <p:cNvPr id="4" name="CuadroTexto 3">
+            <a:extLst>
+              <a:ext uri="{FF2B5EF4-FFF2-40B4-BE49-F238E27FC236}">
+                <a16:creationId xmlns:a16="http://schemas.microsoft.com/office/drawing/2014/main" id="{9AFBBE1B-3885-C6F1-4051-58FE98D5C892}"/>
               </a:ext>
             </a:extLst>
           </p:cNvPr>
@@ -4404,8 +4827,8 @@
         </p:nvSpPr>
         <p:spPr>
           <a:xfrm>
-            <a:off x="762000" y="1778000"/>
-            <a:ext cx="5207000" cy="369332"/>
+            <a:off x="762000" y="1270000"/>
+            <a:ext cx="10668000" cy="1324141"/>
           </a:xfrm>
           <a:prstGeom prst="rect">
             <a:avLst/>
@@ -4418,138 +4841,137 @@
           </a:bodyPr>
           <a:lstStyle/>
           <a:p>
-            <a:pPr indent="-285750">
-              <a:spcAft>
-                <a:spcPts val="600"/>
-              </a:spcAft>
-              <a:buChar char="•"/>
-            </a:pPr>
-            <a:r>
-              <a:rPr lang="es-ES" sz="1300" noProof="0" dirty="0">
-                <a:solidFill>
-                  <a:srgbClr val="374151"/>
-                </a:solidFill>
-              </a:rPr>
-              <a:t>Reglas y comportamiento del dominio</a:t>
-            </a:r>
-          </a:p>
-          <a:p>
-            <a:pPr indent="-285750">
-              <a:spcAft>
-                <a:spcPts val="600"/>
-              </a:spcAft>
-              <a:buChar char="•"/>
-            </a:pPr>
-            <a:r>
-              <a:rPr lang="es-ES" sz="1300" noProof="0" dirty="0">
-                <a:solidFill>
-                  <a:srgbClr val="374151"/>
-                </a:solidFill>
-              </a:rPr>
-              <a:t>Lógica de negocio pura</a:t>
-            </a:r>
-          </a:p>
-          <a:p>
-            <a:pPr indent="-285750">
-              <a:spcAft>
-                <a:spcPts val="600"/>
-              </a:spcAft>
-              <a:buChar char="•"/>
-            </a:pPr>
-            <a:r>
-              <a:rPr lang="es-ES" sz="1300" noProof="0" dirty="0">
-                <a:solidFill>
-                  <a:srgbClr val="374151"/>
-                </a:solidFill>
-              </a:rPr>
-              <a:t>Normalmente sin estado</a:t>
-            </a:r>
-          </a:p>
-          <a:p>
-            <a:pPr indent="-285750">
-              <a:spcAft>
-                <a:spcPts val="600"/>
-              </a:spcAft>
-              <a:buChar char="•"/>
-            </a:pPr>
-            <a:r>
-              <a:rPr lang="es-ES" sz="1300" noProof="0" dirty="0">
-                <a:solidFill>
-                  <a:srgbClr val="374151"/>
-                </a:solidFill>
-              </a:rPr>
-              <a:t>Depende de entidades, </a:t>
-            </a:r>
-            <a:r>
-              <a:rPr lang="es-ES" sz="1300" noProof="0" dirty="0" err="1">
-                <a:solidFill>
-                  <a:srgbClr val="374151"/>
-                </a:solidFill>
-              </a:rPr>
-              <a:t>value</a:t>
-            </a:r>
-            <a:r>
-              <a:rPr lang="es-ES" sz="1300" noProof="0" dirty="0">
-                <a:solidFill>
-                  <a:srgbClr val="374151"/>
-                </a:solidFill>
-              </a:rPr>
-              <a:t> </a:t>
-            </a:r>
-            <a:r>
-              <a:rPr lang="es-ES" sz="1300" noProof="0" dirty="0" err="1">
-                <a:solidFill>
-                  <a:srgbClr val="374151"/>
-                </a:solidFill>
-              </a:rPr>
-              <a:t>objects</a:t>
-            </a:r>
-            <a:endParaRPr lang="es-ES" sz="1300" noProof="0" dirty="0">
+            <a:r>
+              <a:rPr lang="es-ES" sz="1600" dirty="0">
+                <a:solidFill>
+                  <a:srgbClr val="374151"/>
+                </a:solidFill>
+              </a:rPr>
+              <a:t>Encapsulan lógica compleja que no pertenece a una sola entidad, coordinando múltiples entidades.</a:t>
+            </a:r>
+          </a:p>
+          <a:p>
+            <a:r>
+              <a:rPr lang="es-ES" sz="1600" dirty="0">
+                <a:solidFill>
+                  <a:srgbClr val="374151"/>
+                </a:solidFill>
+              </a:rPr>
+              <a:t> </a:t>
+            </a:r>
+          </a:p>
+          <a:p>
+            <a:r>
+              <a:rPr lang="es-ES" sz="1600" dirty="0">
+                <a:solidFill>
+                  <a:srgbClr val="374151"/>
+                </a:solidFill>
+              </a:rPr>
+              <a:t>Un servicio de dominio representa comportamiento del negocio que es importante, pero que no tiene identidad propia ni estado estable para modelarse bien como entidad. Suele ser </a:t>
+            </a:r>
+            <a:r>
+              <a:rPr lang="es-ES" sz="1600" b="1" dirty="0">
+                <a:solidFill>
+                  <a:srgbClr val="374151"/>
+                </a:solidFill>
+              </a:rPr>
+              <a:t>sin estado</a:t>
+            </a:r>
+            <a:r>
+              <a:rPr lang="es-ES" sz="1600" dirty="0">
+                <a:solidFill>
+                  <a:srgbClr val="374151"/>
+                </a:solidFill>
+              </a:rPr>
+              <a:t> y expresa </a:t>
+            </a:r>
+            <a:r>
+              <a:rPr lang="es-ES" sz="1600" b="1" dirty="0">
+                <a:solidFill>
+                  <a:srgbClr val="374151"/>
+                </a:solidFill>
+              </a:rPr>
+              <a:t>reglas o cálculos</a:t>
+            </a:r>
+            <a:r>
+              <a:rPr lang="es-ES" sz="1600" dirty="0">
+                <a:solidFill>
+                  <a:srgbClr val="374151"/>
+                </a:solidFill>
+              </a:rPr>
+              <a:t> del </a:t>
+            </a:r>
+            <a:r>
+              <a:rPr lang="es-ES" sz="1600" b="1" dirty="0">
+                <a:solidFill>
+                  <a:srgbClr val="374151"/>
+                </a:solidFill>
+              </a:rPr>
+              <a:t>dominio</a:t>
+            </a:r>
+            <a:r>
+              <a:rPr lang="es-ES" sz="1600" dirty="0">
+                <a:solidFill>
+                  <a:srgbClr val="374151"/>
+                </a:solidFill>
+              </a:rPr>
+              <a:t>.</a:t>
+            </a:r>
+          </a:p>
+          <a:p>
+            <a:endParaRPr lang="es-ES" sz="1600" noProof="0" dirty="0">
               <a:solidFill>
                 <a:srgbClr val="374151"/>
               </a:solidFill>
             </a:endParaRPr>
           </a:p>
-          <a:p>
-            <a:pPr indent="-285750">
-              <a:spcAft>
-                <a:spcPts val="600"/>
-              </a:spcAft>
-              <a:buChar char="•"/>
-            </a:pPr>
-            <a:r>
-              <a:rPr lang="es-ES" sz="1300" noProof="0" dirty="0">
-                <a:solidFill>
-                  <a:srgbClr val="374151"/>
-                </a:solidFill>
-              </a:rPr>
-              <a:t>¿Cómo decide el dominio esto?</a:t>
-            </a:r>
-          </a:p>
-          <a:p>
-            <a:pPr indent="-285750">
-              <a:spcAft>
-                <a:spcPts val="600"/>
-              </a:spcAft>
-              <a:buChar char="•"/>
-            </a:pPr>
-            <a:r>
-              <a:rPr lang="es-ES" sz="1300" noProof="0" dirty="0">
-                <a:solidFill>
-                  <a:srgbClr val="374151"/>
-                </a:solidFill>
-              </a:rPr>
-              <a:t>Usar cuando la lógica no pertenece a una sola entidad</a:t>
-            </a:r>
-          </a:p>
-        </p:txBody>
-      </p:sp>
-      <p:sp>
-        <p:nvSpPr>
-          <p:cNvPr id="6" name="Rectángulo 5">
-            <a:extLst>
-              <a:ext uri="{FF2B5EF4-FFF2-40B4-BE49-F238E27FC236}">
-                <a16:creationId xmlns:a16="http://schemas.microsoft.com/office/drawing/2014/main" id="{AA0B4F18-8079-9C29-40F2-84643CCD691E}"/>
+        </p:txBody>
+      </p:sp>
+      <p:sp>
+        <p:nvSpPr>
+          <p:cNvPr id="9" name="CuadroTexto 8">
+            <a:extLst>
+              <a:ext uri="{FF2B5EF4-FFF2-40B4-BE49-F238E27FC236}">
+                <a16:creationId xmlns:a16="http://schemas.microsoft.com/office/drawing/2014/main" id="{3313634D-4EC4-8D26-6FFE-3AB9A2EFCCA5}"/>
+              </a:ext>
+            </a:extLst>
+          </p:cNvPr>
+          <p:cNvSpPr txBox="1"/>
+          <p:nvPr/>
+        </p:nvSpPr>
+        <p:spPr>
+          <a:xfrm>
+            <a:off x="762000" y="3107004"/>
+            <a:ext cx="10668000" cy="369332"/>
+          </a:xfrm>
+          <a:prstGeom prst="rect">
+            <a:avLst/>
+          </a:prstGeom>
+          <a:noFill/>
+        </p:spPr>
+        <p:txBody>
+          <a:bodyPr vert="horz" wrap="square" rtlCol="0">
+            <a:noAutofit/>
+          </a:bodyPr>
+          <a:lstStyle/>
+          <a:p>
+            <a:r>
+              <a:rPr lang="es-ES" sz="3000" b="1" noProof="0" dirty="0">
+                <a:solidFill>
+                  <a:srgbClr val="172554"/>
+                </a:solidFill>
+              </a:rPr>
+              <a:t>Servicios de Aplicación</a:t>
+            </a:r>
+          </a:p>
+        </p:txBody>
+      </p:sp>
+      <p:sp>
+        <p:nvSpPr>
+          <p:cNvPr id="10" name="Rectángulo 9">
+            <a:extLst>
+              <a:ext uri="{FF2B5EF4-FFF2-40B4-BE49-F238E27FC236}">
+                <a16:creationId xmlns:a16="http://schemas.microsoft.com/office/drawing/2014/main" id="{13BBE0AE-6483-91DC-4379-D2C3720FF096}"/>
               </a:ext>
             </a:extLst>
           </p:cNvPr>
@@ -4557,9 +4979,9 @@
           <p:nvPr/>
         </p:nvSpPr>
         <p:spPr>
-          <a:xfrm>
-            <a:off x="6350000" y="1270000"/>
-            <a:ext cx="5334000" cy="381000"/>
+          <a:xfrm flipV="1">
+            <a:off x="762000" y="3673641"/>
+            <a:ext cx="4207164" cy="75168"/>
           </a:xfrm>
           <a:prstGeom prst="rect">
             <a:avLst/>
@@ -4608,23 +5030,16 @@
           <a:lstStyle/>
           <a:p>
             <a:pPr algn="ctr"/>
-            <a:r>
-              <a:rPr lang="es-ES" sz="1400" b="1" noProof="0" dirty="0">
-                <a:solidFill>
-                  <a:srgbClr val="FFFFFF"/>
-                </a:solidFill>
-              </a:rPr>
-              <a:t>Servicio de Aplicación</a:t>
-            </a:r>
-          </a:p>
-        </p:txBody>
-      </p:sp>
-      <p:sp>
-        <p:nvSpPr>
-          <p:cNvPr id="7" name="CuadroTexto 6">
-            <a:extLst>
-              <a:ext uri="{FF2B5EF4-FFF2-40B4-BE49-F238E27FC236}">
-                <a16:creationId xmlns:a16="http://schemas.microsoft.com/office/drawing/2014/main" id="{C4257043-530F-56EC-E6A2-20EC921095EC}"/>
+            <a:endParaRPr lang="es-ES" noProof="0" dirty="0"/>
+          </a:p>
+        </p:txBody>
+      </p:sp>
+      <p:sp>
+        <p:nvSpPr>
+          <p:cNvPr id="13" name="CuadroTexto 12">
+            <a:extLst>
+              <a:ext uri="{FF2B5EF4-FFF2-40B4-BE49-F238E27FC236}">
+                <a16:creationId xmlns:a16="http://schemas.microsoft.com/office/drawing/2014/main" id="{ED81A3CD-CA02-A7A9-15B3-623CA4203D55}"/>
               </a:ext>
             </a:extLst>
           </p:cNvPr>
@@ -4633,8 +5048,8 @@
         </p:nvSpPr>
         <p:spPr>
           <a:xfrm>
-            <a:off x="6350000" y="1778000"/>
-            <a:ext cx="5334000" cy="369332"/>
+            <a:off x="914400" y="4165597"/>
+            <a:ext cx="10668000" cy="711204"/>
           </a:xfrm>
           <a:prstGeom prst="rect">
             <a:avLst/>
@@ -4647,146 +5062,76 @@
           </a:bodyPr>
           <a:lstStyle/>
           <a:p>
-            <a:pPr indent="-285750">
-              <a:spcAft>
-                <a:spcPts val="600"/>
-              </a:spcAft>
-              <a:buChar char="•"/>
-            </a:pPr>
-            <a:r>
-              <a:rPr lang="es-ES" sz="1300" noProof="0" dirty="0">
-                <a:solidFill>
-                  <a:srgbClr val="374151"/>
-                </a:solidFill>
-              </a:rPr>
-              <a:t>Orquestación de un caso de uso</a:t>
-            </a:r>
-          </a:p>
-          <a:p>
-            <a:pPr indent="-285750">
-              <a:spcAft>
-                <a:spcPts val="600"/>
-              </a:spcAft>
-              <a:buChar char="•"/>
-            </a:pPr>
-            <a:r>
-              <a:rPr lang="es-ES" sz="1300" noProof="0" dirty="0">
-                <a:solidFill>
-                  <a:srgbClr val="374151"/>
-                </a:solidFill>
-              </a:rPr>
-              <a:t>Flujo, coordinación, transacciones</a:t>
-            </a:r>
-          </a:p>
-          <a:p>
-            <a:pPr indent="-285750">
-              <a:spcAft>
-                <a:spcPts val="600"/>
-              </a:spcAft>
-              <a:buChar char="•"/>
-            </a:pPr>
-            <a:r>
-              <a:rPr lang="es-ES" sz="1300" noProof="0" dirty="0">
-                <a:solidFill>
-                  <a:srgbClr val="374151"/>
-                </a:solidFill>
-              </a:rPr>
-              <a:t>Coordina estado externo</a:t>
-            </a:r>
-          </a:p>
-          <a:p>
-            <a:pPr indent="-285750">
-              <a:spcAft>
-                <a:spcPts val="600"/>
-              </a:spcAft>
-              <a:buChar char="•"/>
-            </a:pPr>
-            <a:r>
-              <a:rPr lang="es-ES" sz="1300" noProof="0" dirty="0">
-                <a:solidFill>
-                  <a:srgbClr val="374151"/>
-                </a:solidFill>
-              </a:rPr>
-              <a:t>Depende de repositorios, infraestructura</a:t>
-            </a:r>
-          </a:p>
-          <a:p>
-            <a:pPr indent="-285750">
-              <a:spcAft>
-                <a:spcPts val="600"/>
-              </a:spcAft>
-              <a:buChar char="•"/>
-            </a:pPr>
-            <a:r>
-              <a:rPr lang="es-ES" sz="1300" noProof="0" dirty="0">
-                <a:solidFill>
-                  <a:srgbClr val="374151"/>
-                </a:solidFill>
-              </a:rPr>
-              <a:t>¿Cómo ejecuto este caso de uso?</a:t>
-            </a:r>
-          </a:p>
-          <a:p>
-            <a:pPr indent="-285750">
-              <a:spcAft>
-                <a:spcPts val="600"/>
-              </a:spcAft>
-              <a:buChar char="•"/>
-            </a:pPr>
-            <a:r>
-              <a:rPr lang="es-ES" sz="1300" noProof="0" dirty="0">
-                <a:solidFill>
-                  <a:srgbClr val="374151"/>
-                </a:solidFill>
-              </a:rPr>
-              <a:t>Validaciones de entrada del DTO</a:t>
-            </a:r>
-          </a:p>
-        </p:txBody>
-      </p:sp>
-      <p:sp>
-        <p:nvSpPr>
-          <p:cNvPr id="8" name="CuadroTexto 7">
-            <a:extLst>
-              <a:ext uri="{FF2B5EF4-FFF2-40B4-BE49-F238E27FC236}">
-                <a16:creationId xmlns:a16="http://schemas.microsoft.com/office/drawing/2014/main" id="{D0CD644A-14A3-641F-2AFC-63C84B9A4B00}"/>
-              </a:ext>
-            </a:extLst>
-          </p:cNvPr>
-          <p:cNvSpPr txBox="1"/>
-          <p:nvPr/>
-        </p:nvSpPr>
-        <p:spPr>
-          <a:xfrm>
-            <a:off x="762000" y="4699000"/>
-            <a:ext cx="10668000" cy="369332"/>
-          </a:xfrm>
-          <a:prstGeom prst="rect">
-            <a:avLst/>
-          </a:prstGeom>
-          <a:noFill/>
-        </p:spPr>
-        <p:txBody>
-          <a:bodyPr vert="horz" wrap="square" rtlCol="0">
-            <a:noAutofit/>
-          </a:bodyPr>
-          <a:lstStyle/>
-          <a:p>
-            <a:r>
-              <a:rPr lang="es-ES" sz="1400" b="1" noProof="0" dirty="0">
-                <a:solidFill>
-                  <a:srgbClr val="EA580C"/>
-                </a:solidFill>
-              </a:rPr>
-              <a:t>Si piensas 'esto pertenece al negocio' = Dominio. Si piensas 'es la receta para ejecutar una acción' = Aplicación.</a:t>
-            </a:r>
+            <a:r>
+              <a:rPr lang="es-ES" sz="1600" dirty="0">
+                <a:solidFill>
+                  <a:srgbClr val="374151"/>
+                </a:solidFill>
+              </a:rPr>
+              <a:t>Un servicio de aplicación representa un </a:t>
+            </a:r>
+            <a:r>
+              <a:rPr lang="es-ES" sz="1600" b="1" dirty="0">
+                <a:solidFill>
+                  <a:srgbClr val="374151"/>
+                </a:solidFill>
+              </a:rPr>
+              <a:t>caso de uso</a:t>
+            </a:r>
+            <a:r>
+              <a:rPr lang="es-ES" sz="1600" dirty="0">
+                <a:solidFill>
+                  <a:srgbClr val="374151"/>
+                </a:solidFill>
+              </a:rPr>
+              <a:t>. Su trabajo no es decidir las reglas del negocio, sino </a:t>
+            </a:r>
+            <a:r>
+              <a:rPr lang="es-ES" sz="1600" b="1" dirty="0">
+                <a:solidFill>
+                  <a:srgbClr val="374151"/>
+                </a:solidFill>
+              </a:rPr>
+              <a:t>coordinar</a:t>
+            </a:r>
+            <a:r>
+              <a:rPr lang="es-ES" sz="1600" dirty="0">
+                <a:solidFill>
+                  <a:srgbClr val="374151"/>
+                </a:solidFill>
+              </a:rPr>
+              <a:t> los </a:t>
+            </a:r>
+            <a:r>
+              <a:rPr lang="es-ES" sz="1600" b="1" dirty="0">
+                <a:solidFill>
+                  <a:srgbClr val="374151"/>
+                </a:solidFill>
+              </a:rPr>
+              <a:t>pasos</a:t>
+            </a:r>
+            <a:r>
+              <a:rPr lang="es-ES" sz="1600" dirty="0">
+                <a:solidFill>
+                  <a:srgbClr val="374151"/>
+                </a:solidFill>
+              </a:rPr>
+              <a:t>: cargar datos, llamar a lógica de dominio, guardar cambios y gestionar transacciones o integraciones.</a:t>
+            </a:r>
+          </a:p>
+          <a:p>
+            <a:endParaRPr lang="es-ES" sz="1600" noProof="0" dirty="0">
+              <a:solidFill>
+                <a:srgbClr val="374151"/>
+              </a:solidFill>
+            </a:endParaRPr>
           </a:p>
         </p:txBody>
       </p:sp>
     </p:spTree>
     <p:extLst>
       <p:ext uri="{BB962C8B-B14F-4D97-AF65-F5344CB8AC3E}">
-        <p14:creationId xmlns:p14="http://schemas.microsoft.com/office/powerpoint/2010/main" val="2368882804"/>
+        <p14:creationId xmlns:p14="http://schemas.microsoft.com/office/powerpoint/2010/main" val="2587532788"/>
       </p:ext>
     </p:extLst>
   </p:cSld>
@@ -4796,7 +5141,7 @@
 </p:sld>
 </file>
 
-<file path=ppt/slides/slide11.xml><?xml version="1.0" encoding="utf-8"?>
+<file path=ppt/slides/slide12.xml><?xml version="1.0" encoding="utf-8"?>
 <p:sld xmlns:a="http://schemas.openxmlformats.org/drawingml/2006/main" xmlns:r="http://schemas.openxmlformats.org/officeDocument/2006/relationships" xmlns:p="http://schemas.openxmlformats.org/presentationml/2006/main">
   <p:cSld>
     <p:bg>
@@ -4826,7 +5171,7 @@
           <p:cNvPr id="2" name="CuadroTexto 1">
             <a:extLst>
               <a:ext uri="{FF2B5EF4-FFF2-40B4-BE49-F238E27FC236}">
-                <a16:creationId xmlns:a16="http://schemas.microsoft.com/office/drawing/2014/main" id="{A6B39EC9-04F5-BC57-37C9-F855CB95C09A}"/>
+                <a16:creationId xmlns:a16="http://schemas.microsoft.com/office/drawing/2014/main" id="{68EEC4E5-C84F-ADCA-230D-B82B2F0FD60B}"/>
               </a:ext>
             </a:extLst>
           </p:cNvPr>
@@ -4850,12 +5195,12 @@
           <a:lstStyle/>
           <a:p>
             <a:r>
-              <a:rPr lang="es-ES" sz="3000" b="1" noProof="0" dirty="0">
+              <a:rPr lang="es-ES" sz="2800" b="1" noProof="0" dirty="0">
                 <a:solidFill>
                   <a:srgbClr val="172554"/>
                 </a:solidFill>
               </a:rPr>
-              <a:t>Patrones de Diseño en DDD</a:t>
+              <a:t>Servicios de Dominio vs Aplicación</a:t>
             </a:r>
           </a:p>
         </p:txBody>
@@ -4865,7 +5210,7 @@
           <p:cNvPr id="3" name="Rectángulo 2">
             <a:extLst>
               <a:ext uri="{FF2B5EF4-FFF2-40B4-BE49-F238E27FC236}">
-                <a16:creationId xmlns:a16="http://schemas.microsoft.com/office/drawing/2014/main" id="{EB338CAC-79C3-2ADE-5B0C-DDA164555B31}"/>
+                <a16:creationId xmlns:a16="http://schemas.microsoft.com/office/drawing/2014/main" id="{D017AD27-340A-17F0-EFE4-E3465E3F2049}"/>
               </a:ext>
             </a:extLst>
           </p:cNvPr>
@@ -4874,8 +5219,8 @@
         </p:nvSpPr>
         <p:spPr>
           <a:xfrm flipV="1">
-            <a:off x="762000" y="970281"/>
-            <a:ext cx="4998720" cy="45719"/>
+            <a:off x="762000" y="950976"/>
+            <a:ext cx="5794248" cy="65024"/>
           </a:xfrm>
           <a:prstGeom prst="rect">
             <a:avLst/>
@@ -4930,10 +5275,10 @@
       </p:sp>
       <p:sp>
         <p:nvSpPr>
-          <p:cNvPr id="4" name="CuadroTexto 3">
-            <a:extLst>
-              <a:ext uri="{FF2B5EF4-FFF2-40B4-BE49-F238E27FC236}">
-                <a16:creationId xmlns:a16="http://schemas.microsoft.com/office/drawing/2014/main" id="{E13D4B08-DBED-F1CB-2AAD-555F427892EC}"/>
+          <p:cNvPr id="8" name="CuadroTexto 7">
+            <a:extLst>
+              <a:ext uri="{FF2B5EF4-FFF2-40B4-BE49-F238E27FC236}">
+                <a16:creationId xmlns:a16="http://schemas.microsoft.com/office/drawing/2014/main" id="{D0CD644A-14A3-641F-2AFC-63C84B9A4B00}"/>
               </a:ext>
             </a:extLst>
           </p:cNvPr>
@@ -4942,8 +5287,8 @@
         </p:nvSpPr>
         <p:spPr>
           <a:xfrm>
-            <a:off x="762000" y="1270000"/>
-            <a:ext cx="10668000" cy="381000"/>
+            <a:off x="632691" y="6050589"/>
+            <a:ext cx="10668000" cy="565727"/>
           </a:xfrm>
           <a:prstGeom prst="rect">
             <a:avLst/>
@@ -4957,35 +5302,1406 @@
           <a:lstStyle/>
           <a:p>
             <a:r>
-              <a:rPr lang="es-ES" sz="2000" b="1" noProof="0" dirty="0">
-                <a:solidFill>
-                  <a:srgbClr val="7C3AED"/>
-                </a:solidFill>
-              </a:rPr>
-              <a:t>Query </a:t>
-            </a:r>
-            <a:r>
-              <a:rPr lang="es-ES" sz="2000" b="1" noProof="0" dirty="0" err="1">
-                <a:solidFill>
-                  <a:srgbClr val="7C3AED"/>
-                </a:solidFill>
-              </a:rPr>
-              <a:t>Object</a:t>
-            </a:r>
-            <a:endParaRPr lang="es-ES" sz="2000" b="1" noProof="0" dirty="0">
-              <a:solidFill>
-                <a:srgbClr val="7C3AED"/>
-              </a:solidFill>
-            </a:endParaRPr>
-          </a:p>
-        </p:txBody>
-      </p:sp>
-      <p:sp>
-        <p:nvSpPr>
-          <p:cNvPr id="5" name="CuadroTexto 4">
-            <a:extLst>
-              <a:ext uri="{FF2B5EF4-FFF2-40B4-BE49-F238E27FC236}">
-                <a16:creationId xmlns:a16="http://schemas.microsoft.com/office/drawing/2014/main" id="{60714F55-F968-6223-7DA9-0981959857F0}"/>
+              <a:rPr lang="es-ES" sz="1400" b="1" dirty="0">
+                <a:solidFill>
+                  <a:srgbClr val="EA580C"/>
+                </a:solidFill>
+              </a:rPr>
+              <a:t>La idea práctica es esta: si la lógica describe una regla del negocio, suele ir en dominio; si describe una secuencia de pasos para completar una acción de usuario o sistema, suele ir en aplicación</a:t>
+            </a:r>
+            <a:r>
+              <a:rPr lang="es-ES" sz="1400" b="1" noProof="0" dirty="0">
+                <a:solidFill>
+                  <a:srgbClr val="EA580C"/>
+                </a:solidFill>
+              </a:rPr>
+              <a:t>.</a:t>
+            </a:r>
+          </a:p>
+        </p:txBody>
+      </p:sp>
+      <p:graphicFrame>
+        <p:nvGraphicFramePr>
+          <p:cNvPr id="9" name="Tabla 8">
+            <a:extLst>
+              <a:ext uri="{FF2B5EF4-FFF2-40B4-BE49-F238E27FC236}">
+                <a16:creationId xmlns:a16="http://schemas.microsoft.com/office/drawing/2014/main" id="{527A6691-963A-3788-0ECE-7FDA4759E4A8}"/>
+              </a:ext>
+            </a:extLst>
+          </p:cNvPr>
+          <p:cNvGraphicFramePr>
+            <a:graphicFrameLocks noGrp="1"/>
+          </p:cNvGraphicFramePr>
+          <p:nvPr>
+            <p:extLst>
+              <p:ext uri="{D42A27DB-BD31-4B8C-83A1-F6EECF244321}">
+                <p14:modId xmlns:p14="http://schemas.microsoft.com/office/powerpoint/2010/main" val="3612883366"/>
+              </p:ext>
+            </p:extLst>
+          </p:nvPr>
+        </p:nvGraphicFramePr>
+        <p:xfrm>
+          <a:off x="715819" y="1436902"/>
+          <a:ext cx="8492190" cy="2035971"/>
+        </p:xfrm>
+        <a:graphic>
+          <a:graphicData uri="http://schemas.openxmlformats.org/drawingml/2006/table">
+            <a:tbl>
+              <a:tblPr firstRow="1" bandRow="1">
+                <a:tableStyleId>{7E9639D4-E3E2-4D34-9284-5A2195B3D0D7}</a:tableStyleId>
+              </a:tblPr>
+              <a:tblGrid>
+                <a:gridCol w="1851890">
+                  <a:extLst>
+                    <a:ext uri="{9D8B030D-6E8A-4147-A177-3AD203B41FA5}">
+                      <a16:colId xmlns:a16="http://schemas.microsoft.com/office/drawing/2014/main" val="1583617869"/>
+                    </a:ext>
+                  </a:extLst>
+                </a:gridCol>
+                <a:gridCol w="2974109">
+                  <a:extLst>
+                    <a:ext uri="{9D8B030D-6E8A-4147-A177-3AD203B41FA5}">
+                      <a16:colId xmlns:a16="http://schemas.microsoft.com/office/drawing/2014/main" val="342146253"/>
+                    </a:ext>
+                  </a:extLst>
+                </a:gridCol>
+                <a:gridCol w="3666191">
+                  <a:extLst>
+                    <a:ext uri="{9D8B030D-6E8A-4147-A177-3AD203B41FA5}">
+                      <a16:colId xmlns:a16="http://schemas.microsoft.com/office/drawing/2014/main" val="3064818203"/>
+                    </a:ext>
+                  </a:extLst>
+                </a:gridCol>
+              </a:tblGrid>
+              <a:tr h="370840">
+                <a:tc>
+                  <a:txBody>
+                    <a:bodyPr/>
+                    <a:lstStyle/>
+                    <a:p>
+                      <a:pPr algn="l"/>
+                      <a:r>
+                        <a:rPr lang="es-ES" sz="1400" b="1" kern="1200" dirty="0">
+                          <a:solidFill>
+                            <a:srgbClr val="FFFFFF"/>
+                          </a:solidFill>
+                        </a:rPr>
+                        <a:t>Aspecto</a:t>
+                      </a:r>
+                      <a:endParaRPr lang="es-ES" sz="1400" b="1" kern="1200" dirty="0">
+                        <a:solidFill>
+                          <a:srgbClr val="FFFFFF"/>
+                        </a:solidFill>
+                        <a:latin typeface="+mn-lt"/>
+                        <a:ea typeface="+mn-ea"/>
+                        <a:cs typeface="+mn-cs"/>
+                      </a:endParaRPr>
+                    </a:p>
+                  </a:txBody>
+                  <a:tcPr>
+                    <a:lnL w="12700" cap="flat" cmpd="sng" algn="ctr">
+                      <a:solidFill>
+                        <a:schemeClr val="tx1"/>
+                      </a:solidFill>
+                      <a:prstDash val="solid"/>
+                      <a:round/>
+                      <a:headEnd type="none" w="med" len="med"/>
+                      <a:tailEnd type="none" w="med" len="med"/>
+                    </a:lnL>
+                    <a:lnR w="12700" cap="flat" cmpd="sng" algn="ctr">
+                      <a:solidFill>
+                        <a:schemeClr val="tx1"/>
+                      </a:solidFill>
+                      <a:prstDash val="solid"/>
+                      <a:round/>
+                      <a:headEnd type="none" w="med" len="med"/>
+                      <a:tailEnd type="none" w="med" len="med"/>
+                    </a:lnR>
+                    <a:lnT w="12700" cap="flat" cmpd="sng" algn="ctr">
+                      <a:solidFill>
+                        <a:schemeClr val="tx1"/>
+                      </a:solidFill>
+                      <a:prstDash val="solid"/>
+                      <a:round/>
+                      <a:headEnd type="none" w="med" len="med"/>
+                      <a:tailEnd type="none" w="med" len="med"/>
+                    </a:lnT>
+                    <a:lnB w="12700" cap="flat" cmpd="sng" algn="ctr">
+                      <a:solidFill>
+                        <a:schemeClr val="tx1"/>
+                      </a:solidFill>
+                      <a:prstDash val="solid"/>
+                      <a:round/>
+                      <a:headEnd type="none" w="med" len="med"/>
+                      <a:tailEnd type="none" w="med" len="med"/>
+                    </a:lnB>
+                    <a:solidFill>
+                      <a:srgbClr val="595959"/>
+                    </a:solidFill>
+                  </a:tcPr>
+                </a:tc>
+                <a:tc>
+                  <a:txBody>
+                    <a:bodyPr/>
+                    <a:lstStyle/>
+                    <a:p>
+                      <a:pPr marL="0" algn="l" defTabSz="914400" rtl="0" eaLnBrk="1" latinLnBrk="0" hangingPunct="1"/>
+                      <a:r>
+                        <a:rPr lang="es-ES" sz="1400" b="1" kern="1200" dirty="0">
+                          <a:solidFill>
+                            <a:srgbClr val="FFFFFF"/>
+                          </a:solidFill>
+                        </a:rPr>
+                        <a:t>Servicio de Dominio</a:t>
+                      </a:r>
+                      <a:endParaRPr lang="es-ES" sz="1400" b="1" kern="1200" dirty="0">
+                        <a:solidFill>
+                          <a:srgbClr val="FFFFFF"/>
+                        </a:solidFill>
+                        <a:latin typeface="+mn-lt"/>
+                        <a:ea typeface="+mn-ea"/>
+                        <a:cs typeface="+mn-cs"/>
+                      </a:endParaRPr>
+                    </a:p>
+                  </a:txBody>
+                  <a:tcPr>
+                    <a:lnL w="12700" cap="flat" cmpd="sng" algn="ctr">
+                      <a:solidFill>
+                        <a:schemeClr val="tx1"/>
+                      </a:solidFill>
+                      <a:prstDash val="solid"/>
+                      <a:round/>
+                      <a:headEnd type="none" w="med" len="med"/>
+                      <a:tailEnd type="none" w="med" len="med"/>
+                    </a:lnL>
+                    <a:lnR w="12700" cap="flat" cmpd="sng" algn="ctr">
+                      <a:solidFill>
+                        <a:schemeClr val="tx1"/>
+                      </a:solidFill>
+                      <a:prstDash val="solid"/>
+                      <a:round/>
+                      <a:headEnd type="none" w="med" len="med"/>
+                      <a:tailEnd type="none" w="med" len="med"/>
+                    </a:lnR>
+                    <a:lnT w="12700" cap="flat" cmpd="sng" algn="ctr">
+                      <a:solidFill>
+                        <a:schemeClr val="tx1"/>
+                      </a:solidFill>
+                      <a:prstDash val="solid"/>
+                      <a:round/>
+                      <a:headEnd type="none" w="med" len="med"/>
+                      <a:tailEnd type="none" w="med" len="med"/>
+                    </a:lnT>
+                    <a:lnB w="12700" cap="flat" cmpd="sng" algn="ctr">
+                      <a:solidFill>
+                        <a:schemeClr val="tx1"/>
+                      </a:solidFill>
+                      <a:prstDash val="solid"/>
+                      <a:round/>
+                      <a:headEnd type="none" w="med" len="med"/>
+                      <a:tailEnd type="none" w="med" len="med"/>
+                    </a:lnB>
+                    <a:solidFill>
+                      <a:schemeClr val="tx1">
+                        <a:lumMod val="65000"/>
+                        <a:lumOff val="35000"/>
+                      </a:schemeClr>
+                    </a:solidFill>
+                  </a:tcPr>
+                </a:tc>
+                <a:tc>
+                  <a:txBody>
+                    <a:bodyPr/>
+                    <a:lstStyle/>
+                    <a:p>
+                      <a:r>
+                        <a:rPr lang="es-ES" sz="1400" b="1" kern="1200" dirty="0">
+                          <a:solidFill>
+                            <a:srgbClr val="FFFFFF"/>
+                          </a:solidFill>
+                        </a:rPr>
+                        <a:t>Servicio de Aplicación</a:t>
+                      </a:r>
+                      <a:endParaRPr lang="es-ES" sz="1400" b="1" kern="1200" dirty="0">
+                        <a:solidFill>
+                          <a:srgbClr val="FFFFFF"/>
+                        </a:solidFill>
+                        <a:latin typeface="+mn-lt"/>
+                        <a:ea typeface="+mn-ea"/>
+                        <a:cs typeface="+mn-cs"/>
+                      </a:endParaRPr>
+                    </a:p>
+                  </a:txBody>
+                  <a:tcPr>
+                    <a:lnL w="12700" cap="flat" cmpd="sng" algn="ctr">
+                      <a:solidFill>
+                        <a:schemeClr val="tx1"/>
+                      </a:solidFill>
+                      <a:prstDash val="solid"/>
+                      <a:round/>
+                      <a:headEnd type="none" w="med" len="med"/>
+                      <a:tailEnd type="none" w="med" len="med"/>
+                    </a:lnL>
+                    <a:lnR w="12700" cap="flat" cmpd="sng" algn="ctr">
+                      <a:solidFill>
+                        <a:schemeClr val="tx1"/>
+                      </a:solidFill>
+                      <a:prstDash val="solid"/>
+                      <a:round/>
+                      <a:headEnd type="none" w="med" len="med"/>
+                      <a:tailEnd type="none" w="med" len="med"/>
+                    </a:lnR>
+                    <a:lnT w="12700" cap="flat" cmpd="sng" algn="ctr">
+                      <a:solidFill>
+                        <a:schemeClr val="tx1"/>
+                      </a:solidFill>
+                      <a:prstDash val="solid"/>
+                      <a:round/>
+                      <a:headEnd type="none" w="med" len="med"/>
+                      <a:tailEnd type="none" w="med" len="med"/>
+                    </a:lnT>
+                    <a:lnB w="12700" cap="flat" cmpd="sng" algn="ctr">
+                      <a:solidFill>
+                        <a:schemeClr val="tx1"/>
+                      </a:solidFill>
+                      <a:prstDash val="solid"/>
+                      <a:round/>
+                      <a:headEnd type="none" w="med" len="med"/>
+                      <a:tailEnd type="none" w="med" len="med"/>
+                    </a:lnB>
+                    <a:solidFill>
+                      <a:srgbClr val="595959"/>
+                    </a:solidFill>
+                  </a:tcPr>
+                </a:tc>
+                <a:extLst>
+                  <a:ext uri="{0D108BD9-81ED-4DB2-BD59-A6C34878D82A}">
+                    <a16:rowId xmlns:a16="http://schemas.microsoft.com/office/drawing/2014/main" val="910913849"/>
+                  </a:ext>
+                </a:extLst>
+              </a:tr>
+              <a:tr h="0">
+                <a:tc>
+                  <a:txBody>
+                    <a:bodyPr/>
+                    <a:lstStyle/>
+                    <a:p>
+                      <a:r>
+                        <a:rPr lang="es-ES" sz="1300" kern="1200" dirty="0">
+                          <a:solidFill>
+                            <a:srgbClr val="374151"/>
+                          </a:solidFill>
+                        </a:rPr>
+                        <a:t>Responsabilidad</a:t>
+                      </a:r>
+                      <a:endParaRPr lang="es-ES" sz="1300" kern="1200" dirty="0">
+                        <a:solidFill>
+                          <a:srgbClr val="374151"/>
+                        </a:solidFill>
+                        <a:latin typeface="+mn-lt"/>
+                        <a:ea typeface="+mn-ea"/>
+                        <a:cs typeface="+mn-cs"/>
+                      </a:endParaRPr>
+                    </a:p>
+                  </a:txBody>
+                  <a:tcPr>
+                    <a:lnL w="12700" cap="flat" cmpd="sng" algn="ctr">
+                      <a:solidFill>
+                        <a:schemeClr val="tx1"/>
+                      </a:solidFill>
+                      <a:prstDash val="solid"/>
+                      <a:round/>
+                      <a:headEnd type="none" w="med" len="med"/>
+                      <a:tailEnd type="none" w="med" len="med"/>
+                    </a:lnL>
+                    <a:lnR w="12700" cap="flat" cmpd="sng" algn="ctr">
+                      <a:solidFill>
+                        <a:schemeClr val="tx1"/>
+                      </a:solidFill>
+                      <a:prstDash val="solid"/>
+                      <a:round/>
+                      <a:headEnd type="none" w="med" len="med"/>
+                      <a:tailEnd type="none" w="med" len="med"/>
+                    </a:lnR>
+                    <a:lnT w="12700" cap="flat" cmpd="sng" algn="ctr">
+                      <a:solidFill>
+                        <a:schemeClr val="tx1"/>
+                      </a:solidFill>
+                      <a:prstDash val="solid"/>
+                      <a:round/>
+                      <a:headEnd type="none" w="med" len="med"/>
+                      <a:tailEnd type="none" w="med" len="med"/>
+                    </a:lnT>
+                    <a:lnB w="12700" cap="flat" cmpd="sng" algn="ctr">
+                      <a:solidFill>
+                        <a:schemeClr val="tx1"/>
+                      </a:solidFill>
+                      <a:prstDash val="solid"/>
+                      <a:round/>
+                      <a:headEnd type="none" w="med" len="med"/>
+                      <a:tailEnd type="none" w="med" len="med"/>
+                    </a:lnB>
+                  </a:tcPr>
+                </a:tc>
+                <a:tc>
+                  <a:txBody>
+                    <a:bodyPr/>
+                    <a:lstStyle/>
+                    <a:p>
+                      <a:pPr marL="0" marR="0" lvl="0" indent="0" algn="l" defTabSz="914400" rtl="0" eaLnBrk="1" fontAlgn="auto" latinLnBrk="0" hangingPunct="1">
+                        <a:lnSpc>
+                          <a:spcPct val="100000"/>
+                        </a:lnSpc>
+                        <a:spcBef>
+                          <a:spcPts val="0"/>
+                        </a:spcBef>
+                        <a:spcAft>
+                          <a:spcPts val="0"/>
+                        </a:spcAft>
+                        <a:buClrTx/>
+                        <a:buSzTx/>
+                        <a:buFontTx/>
+                        <a:buNone/>
+                        <a:tabLst/>
+                        <a:defRPr/>
+                      </a:pPr>
+                      <a:r>
+                        <a:rPr lang="es-ES" sz="1300" kern="1200" noProof="0" dirty="0">
+                          <a:solidFill>
+                            <a:srgbClr val="374151"/>
+                          </a:solidFill>
+                        </a:rPr>
+                        <a:t>Reglas y comportamiento del dominio</a:t>
+                      </a:r>
+                      <a:endParaRPr lang="es-ES" sz="1300" kern="1200" noProof="0" dirty="0">
+                        <a:solidFill>
+                          <a:srgbClr val="374151"/>
+                        </a:solidFill>
+                        <a:latin typeface="+mn-lt"/>
+                        <a:ea typeface="+mn-ea"/>
+                        <a:cs typeface="+mn-cs"/>
+                      </a:endParaRPr>
+                    </a:p>
+                  </a:txBody>
+                  <a:tcPr>
+                    <a:lnL w="12700" cap="flat" cmpd="sng" algn="ctr">
+                      <a:solidFill>
+                        <a:schemeClr val="tx1"/>
+                      </a:solidFill>
+                      <a:prstDash val="solid"/>
+                      <a:round/>
+                      <a:headEnd type="none" w="med" len="med"/>
+                      <a:tailEnd type="none" w="med" len="med"/>
+                    </a:lnL>
+                    <a:lnR w="12700" cap="flat" cmpd="sng" algn="ctr">
+                      <a:solidFill>
+                        <a:schemeClr val="tx1"/>
+                      </a:solidFill>
+                      <a:prstDash val="solid"/>
+                      <a:round/>
+                      <a:headEnd type="none" w="med" len="med"/>
+                      <a:tailEnd type="none" w="med" len="med"/>
+                    </a:lnR>
+                    <a:lnT w="12700" cap="flat" cmpd="sng" algn="ctr">
+                      <a:solidFill>
+                        <a:schemeClr val="tx1"/>
+                      </a:solidFill>
+                      <a:prstDash val="solid"/>
+                      <a:round/>
+                      <a:headEnd type="none" w="med" len="med"/>
+                      <a:tailEnd type="none" w="med" len="med"/>
+                    </a:lnT>
+                    <a:lnB w="12700" cap="flat" cmpd="sng" algn="ctr">
+                      <a:solidFill>
+                        <a:schemeClr val="tx1"/>
+                      </a:solidFill>
+                      <a:prstDash val="solid"/>
+                      <a:round/>
+                      <a:headEnd type="none" w="med" len="med"/>
+                      <a:tailEnd type="none" w="med" len="med"/>
+                    </a:lnB>
+                  </a:tcPr>
+                </a:tc>
+                <a:tc>
+                  <a:txBody>
+                    <a:bodyPr/>
+                    <a:lstStyle/>
+                    <a:p>
+                      <a:pPr marL="0" marR="0" lvl="0" indent="0" algn="l" defTabSz="914400" rtl="0" eaLnBrk="1" fontAlgn="auto" latinLnBrk="0" hangingPunct="1">
+                        <a:lnSpc>
+                          <a:spcPct val="100000"/>
+                        </a:lnSpc>
+                        <a:spcBef>
+                          <a:spcPts val="0"/>
+                        </a:spcBef>
+                        <a:spcAft>
+                          <a:spcPts val="0"/>
+                        </a:spcAft>
+                        <a:buClrTx/>
+                        <a:buSzTx/>
+                        <a:buFontTx/>
+                        <a:buNone/>
+                        <a:tabLst/>
+                        <a:defRPr/>
+                      </a:pPr>
+                      <a:r>
+                        <a:rPr lang="es-ES" sz="1300" kern="1200" noProof="0" dirty="0">
+                          <a:solidFill>
+                            <a:srgbClr val="374151"/>
+                          </a:solidFill>
+                        </a:rPr>
+                        <a:t>Orquestación de un caso de uso</a:t>
+                      </a:r>
+                      <a:endParaRPr lang="es-ES" sz="1300" kern="1200" noProof="0" dirty="0">
+                        <a:solidFill>
+                          <a:srgbClr val="374151"/>
+                        </a:solidFill>
+                        <a:latin typeface="+mn-lt"/>
+                        <a:ea typeface="+mn-ea"/>
+                        <a:cs typeface="+mn-cs"/>
+                      </a:endParaRPr>
+                    </a:p>
+                  </a:txBody>
+                  <a:tcPr>
+                    <a:lnL w="12700" cap="flat" cmpd="sng" algn="ctr">
+                      <a:solidFill>
+                        <a:schemeClr val="tx1"/>
+                      </a:solidFill>
+                      <a:prstDash val="solid"/>
+                      <a:round/>
+                      <a:headEnd type="none" w="med" len="med"/>
+                      <a:tailEnd type="none" w="med" len="med"/>
+                    </a:lnL>
+                    <a:lnR w="12700" cap="flat" cmpd="sng" algn="ctr">
+                      <a:solidFill>
+                        <a:schemeClr val="tx1"/>
+                      </a:solidFill>
+                      <a:prstDash val="solid"/>
+                      <a:round/>
+                      <a:headEnd type="none" w="med" len="med"/>
+                      <a:tailEnd type="none" w="med" len="med"/>
+                    </a:lnR>
+                    <a:lnT w="12700" cap="flat" cmpd="sng" algn="ctr">
+                      <a:solidFill>
+                        <a:schemeClr val="tx1"/>
+                      </a:solidFill>
+                      <a:prstDash val="solid"/>
+                      <a:round/>
+                      <a:headEnd type="none" w="med" len="med"/>
+                      <a:tailEnd type="none" w="med" len="med"/>
+                    </a:lnT>
+                    <a:lnB w="12700" cap="flat" cmpd="sng" algn="ctr">
+                      <a:solidFill>
+                        <a:schemeClr val="tx1"/>
+                      </a:solidFill>
+                      <a:prstDash val="solid"/>
+                      <a:round/>
+                      <a:headEnd type="none" w="med" len="med"/>
+                      <a:tailEnd type="none" w="med" len="med"/>
+                    </a:lnB>
+                  </a:tcPr>
+                </a:tc>
+                <a:extLst>
+                  <a:ext uri="{0D108BD9-81ED-4DB2-BD59-A6C34878D82A}">
+                    <a16:rowId xmlns:a16="http://schemas.microsoft.com/office/drawing/2014/main" val="2479624231"/>
+                  </a:ext>
+                </a:extLst>
+              </a:tr>
+              <a:tr h="341344">
+                <a:tc>
+                  <a:txBody>
+                    <a:bodyPr/>
+                    <a:lstStyle/>
+                    <a:p>
+                      <a:r>
+                        <a:rPr lang="es-ES" sz="1300" kern="1200" dirty="0">
+                          <a:solidFill>
+                            <a:srgbClr val="374151"/>
+                          </a:solidFill>
+                        </a:rPr>
+                        <a:t>Contenido</a:t>
+                      </a:r>
+                      <a:endParaRPr lang="es-ES" sz="1300" kern="1200" dirty="0">
+                        <a:solidFill>
+                          <a:srgbClr val="374151"/>
+                        </a:solidFill>
+                        <a:latin typeface="+mn-lt"/>
+                        <a:ea typeface="+mn-ea"/>
+                        <a:cs typeface="+mn-cs"/>
+                      </a:endParaRPr>
+                    </a:p>
+                  </a:txBody>
+                  <a:tcPr>
+                    <a:lnL w="12700" cap="flat" cmpd="sng" algn="ctr">
+                      <a:solidFill>
+                        <a:schemeClr val="tx1"/>
+                      </a:solidFill>
+                      <a:prstDash val="solid"/>
+                      <a:round/>
+                      <a:headEnd type="none" w="med" len="med"/>
+                      <a:tailEnd type="none" w="med" len="med"/>
+                    </a:lnL>
+                    <a:lnR w="12700" cap="flat" cmpd="sng" algn="ctr">
+                      <a:solidFill>
+                        <a:schemeClr val="tx1"/>
+                      </a:solidFill>
+                      <a:prstDash val="solid"/>
+                      <a:round/>
+                      <a:headEnd type="none" w="med" len="med"/>
+                      <a:tailEnd type="none" w="med" len="med"/>
+                    </a:lnR>
+                    <a:lnT w="12700" cap="flat" cmpd="sng" algn="ctr">
+                      <a:solidFill>
+                        <a:schemeClr val="tx1"/>
+                      </a:solidFill>
+                      <a:prstDash val="solid"/>
+                      <a:round/>
+                      <a:headEnd type="none" w="med" len="med"/>
+                      <a:tailEnd type="none" w="med" len="med"/>
+                    </a:lnT>
+                    <a:lnB w="12700" cap="flat" cmpd="sng" algn="ctr">
+                      <a:solidFill>
+                        <a:schemeClr val="tx1"/>
+                      </a:solidFill>
+                      <a:prstDash val="solid"/>
+                      <a:round/>
+                      <a:headEnd type="none" w="med" len="med"/>
+                      <a:tailEnd type="none" w="med" len="med"/>
+                    </a:lnB>
+                  </a:tcPr>
+                </a:tc>
+                <a:tc>
+                  <a:txBody>
+                    <a:bodyPr/>
+                    <a:lstStyle/>
+                    <a:p>
+                      <a:pPr marL="0" marR="0" lvl="0" indent="0" algn="l" defTabSz="914400" rtl="0" eaLnBrk="1" fontAlgn="auto" latinLnBrk="0" hangingPunct="1">
+                        <a:lnSpc>
+                          <a:spcPct val="100000"/>
+                        </a:lnSpc>
+                        <a:spcBef>
+                          <a:spcPts val="0"/>
+                        </a:spcBef>
+                        <a:spcAft>
+                          <a:spcPts val="0"/>
+                        </a:spcAft>
+                        <a:buClrTx/>
+                        <a:buSzTx/>
+                        <a:buFontTx/>
+                        <a:buNone/>
+                        <a:tabLst/>
+                        <a:defRPr/>
+                      </a:pPr>
+                      <a:r>
+                        <a:rPr lang="es-ES" sz="1300" kern="1200" noProof="0" dirty="0">
+                          <a:solidFill>
+                            <a:srgbClr val="374151"/>
+                          </a:solidFill>
+                        </a:rPr>
+                        <a:t>Lógica de negocio pura</a:t>
+                      </a:r>
+                      <a:endParaRPr lang="es-ES" sz="1300" kern="1200" noProof="0" dirty="0">
+                        <a:solidFill>
+                          <a:srgbClr val="374151"/>
+                        </a:solidFill>
+                        <a:latin typeface="+mn-lt"/>
+                        <a:ea typeface="+mn-ea"/>
+                        <a:cs typeface="+mn-cs"/>
+                      </a:endParaRPr>
+                    </a:p>
+                  </a:txBody>
+                  <a:tcPr>
+                    <a:lnL w="12700" cap="flat" cmpd="sng" algn="ctr">
+                      <a:solidFill>
+                        <a:schemeClr val="tx1"/>
+                      </a:solidFill>
+                      <a:prstDash val="solid"/>
+                      <a:round/>
+                      <a:headEnd type="none" w="med" len="med"/>
+                      <a:tailEnd type="none" w="med" len="med"/>
+                    </a:lnL>
+                    <a:lnR w="12700" cap="flat" cmpd="sng" algn="ctr">
+                      <a:solidFill>
+                        <a:schemeClr val="tx1"/>
+                      </a:solidFill>
+                      <a:prstDash val="solid"/>
+                      <a:round/>
+                      <a:headEnd type="none" w="med" len="med"/>
+                      <a:tailEnd type="none" w="med" len="med"/>
+                    </a:lnR>
+                    <a:lnT w="12700" cap="flat" cmpd="sng" algn="ctr">
+                      <a:solidFill>
+                        <a:schemeClr val="tx1"/>
+                      </a:solidFill>
+                      <a:prstDash val="solid"/>
+                      <a:round/>
+                      <a:headEnd type="none" w="med" len="med"/>
+                      <a:tailEnd type="none" w="med" len="med"/>
+                    </a:lnT>
+                    <a:lnB w="12700" cap="flat" cmpd="sng" algn="ctr">
+                      <a:solidFill>
+                        <a:schemeClr val="tx1"/>
+                      </a:solidFill>
+                      <a:prstDash val="solid"/>
+                      <a:round/>
+                      <a:headEnd type="none" w="med" len="med"/>
+                      <a:tailEnd type="none" w="med" len="med"/>
+                    </a:lnB>
+                  </a:tcPr>
+                </a:tc>
+                <a:tc>
+                  <a:txBody>
+                    <a:bodyPr/>
+                    <a:lstStyle/>
+                    <a:p>
+                      <a:pPr marL="0" marR="0" lvl="0" indent="0" algn="l" defTabSz="914400" rtl="0" eaLnBrk="1" fontAlgn="auto" latinLnBrk="0" hangingPunct="1">
+                        <a:lnSpc>
+                          <a:spcPct val="100000"/>
+                        </a:lnSpc>
+                        <a:spcBef>
+                          <a:spcPts val="0"/>
+                        </a:spcBef>
+                        <a:spcAft>
+                          <a:spcPts val="0"/>
+                        </a:spcAft>
+                        <a:buClrTx/>
+                        <a:buSzTx/>
+                        <a:buFontTx/>
+                        <a:buNone/>
+                        <a:tabLst/>
+                        <a:defRPr/>
+                      </a:pPr>
+                      <a:r>
+                        <a:rPr lang="es-ES" sz="1300" kern="1200" noProof="0" dirty="0">
+                          <a:solidFill>
+                            <a:srgbClr val="374151"/>
+                          </a:solidFill>
+                        </a:rPr>
+                        <a:t>Flujo, coordinación, transacciones</a:t>
+                      </a:r>
+                      <a:endParaRPr lang="es-ES" dirty="0"/>
+                    </a:p>
+                  </a:txBody>
+                  <a:tcPr>
+                    <a:lnL w="12700" cap="flat" cmpd="sng" algn="ctr">
+                      <a:solidFill>
+                        <a:schemeClr val="tx1"/>
+                      </a:solidFill>
+                      <a:prstDash val="solid"/>
+                      <a:round/>
+                      <a:headEnd type="none" w="med" len="med"/>
+                      <a:tailEnd type="none" w="med" len="med"/>
+                    </a:lnL>
+                    <a:lnR w="12700" cap="flat" cmpd="sng" algn="ctr">
+                      <a:solidFill>
+                        <a:schemeClr val="tx1"/>
+                      </a:solidFill>
+                      <a:prstDash val="solid"/>
+                      <a:round/>
+                      <a:headEnd type="none" w="med" len="med"/>
+                      <a:tailEnd type="none" w="med" len="med"/>
+                    </a:lnR>
+                    <a:lnT w="12700" cap="flat" cmpd="sng" algn="ctr">
+                      <a:solidFill>
+                        <a:schemeClr val="tx1"/>
+                      </a:solidFill>
+                      <a:prstDash val="solid"/>
+                      <a:round/>
+                      <a:headEnd type="none" w="med" len="med"/>
+                      <a:tailEnd type="none" w="med" len="med"/>
+                    </a:lnT>
+                    <a:lnB w="12700" cap="flat" cmpd="sng" algn="ctr">
+                      <a:solidFill>
+                        <a:schemeClr val="tx1"/>
+                      </a:solidFill>
+                      <a:prstDash val="solid"/>
+                      <a:round/>
+                      <a:headEnd type="none" w="med" len="med"/>
+                      <a:tailEnd type="none" w="med" len="med"/>
+                    </a:lnB>
+                  </a:tcPr>
+                </a:tc>
+                <a:extLst>
+                  <a:ext uri="{0D108BD9-81ED-4DB2-BD59-A6C34878D82A}">
+                    <a16:rowId xmlns:a16="http://schemas.microsoft.com/office/drawing/2014/main" val="2970568162"/>
+                  </a:ext>
+                </a:extLst>
+              </a:tr>
+              <a:tr h="344670">
+                <a:tc>
+                  <a:txBody>
+                    <a:bodyPr/>
+                    <a:lstStyle/>
+                    <a:p>
+                      <a:r>
+                        <a:rPr lang="es-ES" sz="1300" kern="1200" dirty="0">
+                          <a:solidFill>
+                            <a:srgbClr val="374151"/>
+                          </a:solidFill>
+                        </a:rPr>
+                        <a:t>Estado</a:t>
+                      </a:r>
+                      <a:endParaRPr lang="es-ES" sz="1300" kern="1200" dirty="0">
+                        <a:solidFill>
+                          <a:srgbClr val="374151"/>
+                        </a:solidFill>
+                        <a:latin typeface="+mn-lt"/>
+                        <a:ea typeface="+mn-ea"/>
+                        <a:cs typeface="+mn-cs"/>
+                      </a:endParaRPr>
+                    </a:p>
+                  </a:txBody>
+                  <a:tcPr>
+                    <a:lnL w="12700" cap="flat" cmpd="sng" algn="ctr">
+                      <a:solidFill>
+                        <a:schemeClr val="tx1"/>
+                      </a:solidFill>
+                      <a:prstDash val="solid"/>
+                      <a:round/>
+                      <a:headEnd type="none" w="med" len="med"/>
+                      <a:tailEnd type="none" w="med" len="med"/>
+                    </a:lnL>
+                    <a:lnR w="12700" cap="flat" cmpd="sng" algn="ctr">
+                      <a:solidFill>
+                        <a:schemeClr val="tx1"/>
+                      </a:solidFill>
+                      <a:prstDash val="solid"/>
+                      <a:round/>
+                      <a:headEnd type="none" w="med" len="med"/>
+                      <a:tailEnd type="none" w="med" len="med"/>
+                    </a:lnR>
+                    <a:lnT w="12700" cap="flat" cmpd="sng" algn="ctr">
+                      <a:solidFill>
+                        <a:schemeClr val="tx1"/>
+                      </a:solidFill>
+                      <a:prstDash val="solid"/>
+                      <a:round/>
+                      <a:headEnd type="none" w="med" len="med"/>
+                      <a:tailEnd type="none" w="med" len="med"/>
+                    </a:lnT>
+                    <a:lnB w="12700" cap="flat" cmpd="sng" algn="ctr">
+                      <a:solidFill>
+                        <a:schemeClr val="tx1"/>
+                      </a:solidFill>
+                      <a:prstDash val="solid"/>
+                      <a:round/>
+                      <a:headEnd type="none" w="med" len="med"/>
+                      <a:tailEnd type="none" w="med" len="med"/>
+                    </a:lnB>
+                  </a:tcPr>
+                </a:tc>
+                <a:tc>
+                  <a:txBody>
+                    <a:bodyPr/>
+                    <a:lstStyle/>
+                    <a:p>
+                      <a:pPr marL="0" marR="0" lvl="0" indent="0" algn="l" defTabSz="914400" rtl="0" eaLnBrk="1" fontAlgn="auto" latinLnBrk="0" hangingPunct="1">
+                        <a:lnSpc>
+                          <a:spcPct val="100000"/>
+                        </a:lnSpc>
+                        <a:spcBef>
+                          <a:spcPts val="0"/>
+                        </a:spcBef>
+                        <a:spcAft>
+                          <a:spcPts val="0"/>
+                        </a:spcAft>
+                        <a:buClrTx/>
+                        <a:buSzTx/>
+                        <a:buFontTx/>
+                        <a:buNone/>
+                        <a:tabLst/>
+                        <a:defRPr/>
+                      </a:pPr>
+                      <a:r>
+                        <a:rPr lang="es-ES" sz="1300" kern="1200" noProof="0" dirty="0">
+                          <a:solidFill>
+                            <a:srgbClr val="374151"/>
+                          </a:solidFill>
+                        </a:rPr>
+                        <a:t>Normalmente sin estado</a:t>
+                      </a:r>
+                      <a:endParaRPr lang="es-ES" sz="1300" kern="1200" noProof="0" dirty="0">
+                        <a:solidFill>
+                          <a:srgbClr val="374151"/>
+                        </a:solidFill>
+                        <a:latin typeface="+mn-lt"/>
+                        <a:ea typeface="+mn-ea"/>
+                        <a:cs typeface="+mn-cs"/>
+                      </a:endParaRPr>
+                    </a:p>
+                  </a:txBody>
+                  <a:tcPr>
+                    <a:lnL w="12700" cap="flat" cmpd="sng" algn="ctr">
+                      <a:solidFill>
+                        <a:schemeClr val="tx1"/>
+                      </a:solidFill>
+                      <a:prstDash val="solid"/>
+                      <a:round/>
+                      <a:headEnd type="none" w="med" len="med"/>
+                      <a:tailEnd type="none" w="med" len="med"/>
+                    </a:lnL>
+                    <a:lnR w="12700" cap="flat" cmpd="sng" algn="ctr">
+                      <a:solidFill>
+                        <a:schemeClr val="tx1"/>
+                      </a:solidFill>
+                      <a:prstDash val="solid"/>
+                      <a:round/>
+                      <a:headEnd type="none" w="med" len="med"/>
+                      <a:tailEnd type="none" w="med" len="med"/>
+                    </a:lnR>
+                    <a:lnT w="12700" cap="flat" cmpd="sng" algn="ctr">
+                      <a:solidFill>
+                        <a:schemeClr val="tx1"/>
+                      </a:solidFill>
+                      <a:prstDash val="solid"/>
+                      <a:round/>
+                      <a:headEnd type="none" w="med" len="med"/>
+                      <a:tailEnd type="none" w="med" len="med"/>
+                    </a:lnT>
+                    <a:lnB w="12700" cap="flat" cmpd="sng" algn="ctr">
+                      <a:solidFill>
+                        <a:schemeClr val="tx1"/>
+                      </a:solidFill>
+                      <a:prstDash val="solid"/>
+                      <a:round/>
+                      <a:headEnd type="none" w="med" len="med"/>
+                      <a:tailEnd type="none" w="med" len="med"/>
+                    </a:lnB>
+                  </a:tcPr>
+                </a:tc>
+                <a:tc>
+                  <a:txBody>
+                    <a:bodyPr/>
+                    <a:lstStyle/>
+                    <a:p>
+                      <a:pPr marL="0" marR="0" lvl="0" indent="0" algn="l" defTabSz="914400" rtl="0" eaLnBrk="1" fontAlgn="auto" latinLnBrk="0" hangingPunct="1">
+                        <a:lnSpc>
+                          <a:spcPct val="100000"/>
+                        </a:lnSpc>
+                        <a:spcBef>
+                          <a:spcPts val="0"/>
+                        </a:spcBef>
+                        <a:spcAft>
+                          <a:spcPts val="0"/>
+                        </a:spcAft>
+                        <a:buClrTx/>
+                        <a:buSzTx/>
+                        <a:buFontTx/>
+                        <a:buNone/>
+                        <a:tabLst/>
+                        <a:defRPr/>
+                      </a:pPr>
+                      <a:r>
+                        <a:rPr lang="es-ES" sz="1300" kern="1200" noProof="0" dirty="0">
+                          <a:solidFill>
+                            <a:srgbClr val="374151"/>
+                          </a:solidFill>
+                        </a:rPr>
+                        <a:t>Coordina estado externo</a:t>
+                      </a:r>
+                      <a:endParaRPr lang="es-ES" dirty="0"/>
+                    </a:p>
+                  </a:txBody>
+                  <a:tcPr>
+                    <a:lnL w="12700" cap="flat" cmpd="sng" algn="ctr">
+                      <a:solidFill>
+                        <a:schemeClr val="tx1"/>
+                      </a:solidFill>
+                      <a:prstDash val="solid"/>
+                      <a:round/>
+                      <a:headEnd type="none" w="med" len="med"/>
+                      <a:tailEnd type="none" w="med" len="med"/>
+                    </a:lnL>
+                    <a:lnR w="12700" cap="flat" cmpd="sng" algn="ctr">
+                      <a:solidFill>
+                        <a:schemeClr val="tx1"/>
+                      </a:solidFill>
+                      <a:prstDash val="solid"/>
+                      <a:round/>
+                      <a:headEnd type="none" w="med" len="med"/>
+                      <a:tailEnd type="none" w="med" len="med"/>
+                    </a:lnR>
+                    <a:lnT w="12700" cap="flat" cmpd="sng" algn="ctr">
+                      <a:solidFill>
+                        <a:schemeClr val="tx1"/>
+                      </a:solidFill>
+                      <a:prstDash val="solid"/>
+                      <a:round/>
+                      <a:headEnd type="none" w="med" len="med"/>
+                      <a:tailEnd type="none" w="med" len="med"/>
+                    </a:lnT>
+                    <a:lnB w="12700" cap="flat" cmpd="sng" algn="ctr">
+                      <a:solidFill>
+                        <a:schemeClr val="tx1"/>
+                      </a:solidFill>
+                      <a:prstDash val="solid"/>
+                      <a:round/>
+                      <a:headEnd type="none" w="med" len="med"/>
+                      <a:tailEnd type="none" w="med" len="med"/>
+                    </a:lnB>
+                  </a:tcPr>
+                </a:tc>
+                <a:extLst>
+                  <a:ext uri="{0D108BD9-81ED-4DB2-BD59-A6C34878D82A}">
+                    <a16:rowId xmlns:a16="http://schemas.microsoft.com/office/drawing/2014/main" val="2098583579"/>
+                  </a:ext>
+                </a:extLst>
+              </a:tr>
+              <a:tr h="341408">
+                <a:tc>
+                  <a:txBody>
+                    <a:bodyPr/>
+                    <a:lstStyle/>
+                    <a:p>
+                      <a:r>
+                        <a:rPr lang="es-ES" sz="1300" kern="1200" dirty="0">
+                          <a:solidFill>
+                            <a:srgbClr val="374151"/>
+                          </a:solidFill>
+                        </a:rPr>
+                        <a:t>Dependencias</a:t>
+                      </a:r>
+                      <a:endParaRPr lang="es-ES" sz="1300" kern="1200" dirty="0">
+                        <a:solidFill>
+                          <a:srgbClr val="374151"/>
+                        </a:solidFill>
+                        <a:latin typeface="+mn-lt"/>
+                        <a:ea typeface="+mn-ea"/>
+                        <a:cs typeface="+mn-cs"/>
+                      </a:endParaRPr>
+                    </a:p>
+                  </a:txBody>
+                  <a:tcPr>
+                    <a:lnL w="12700" cap="flat" cmpd="sng" algn="ctr">
+                      <a:solidFill>
+                        <a:schemeClr val="tx1"/>
+                      </a:solidFill>
+                      <a:prstDash val="solid"/>
+                      <a:round/>
+                      <a:headEnd type="none" w="med" len="med"/>
+                      <a:tailEnd type="none" w="med" len="med"/>
+                    </a:lnL>
+                    <a:lnR w="12700" cap="flat" cmpd="sng" algn="ctr">
+                      <a:solidFill>
+                        <a:schemeClr val="tx1"/>
+                      </a:solidFill>
+                      <a:prstDash val="solid"/>
+                      <a:round/>
+                      <a:headEnd type="none" w="med" len="med"/>
+                      <a:tailEnd type="none" w="med" len="med"/>
+                    </a:lnR>
+                    <a:lnT w="12700" cap="flat" cmpd="sng" algn="ctr">
+                      <a:solidFill>
+                        <a:schemeClr val="tx1"/>
+                      </a:solidFill>
+                      <a:prstDash val="solid"/>
+                      <a:round/>
+                      <a:headEnd type="none" w="med" len="med"/>
+                      <a:tailEnd type="none" w="med" len="med"/>
+                    </a:lnT>
+                    <a:lnB w="12700" cap="flat" cmpd="sng" algn="ctr">
+                      <a:solidFill>
+                        <a:schemeClr val="tx1"/>
+                      </a:solidFill>
+                      <a:prstDash val="solid"/>
+                      <a:round/>
+                      <a:headEnd type="none" w="med" len="med"/>
+                      <a:tailEnd type="none" w="med" len="med"/>
+                    </a:lnB>
+                  </a:tcPr>
+                </a:tc>
+                <a:tc>
+                  <a:txBody>
+                    <a:bodyPr/>
+                    <a:lstStyle/>
+                    <a:p>
+                      <a:pPr marL="0" marR="0" lvl="0" indent="0" algn="l" defTabSz="914400" rtl="0" eaLnBrk="1" fontAlgn="auto" latinLnBrk="0" hangingPunct="1">
+                        <a:lnSpc>
+                          <a:spcPct val="100000"/>
+                        </a:lnSpc>
+                        <a:spcBef>
+                          <a:spcPts val="0"/>
+                        </a:spcBef>
+                        <a:spcAft>
+                          <a:spcPts val="0"/>
+                        </a:spcAft>
+                        <a:buClrTx/>
+                        <a:buSzTx/>
+                        <a:buFontTx/>
+                        <a:buNone/>
+                        <a:tabLst/>
+                        <a:defRPr/>
+                      </a:pPr>
+                      <a:r>
+                        <a:rPr lang="es-ES" sz="1300" kern="1200" noProof="0" dirty="0">
+                          <a:solidFill>
+                            <a:srgbClr val="374151"/>
+                          </a:solidFill>
+                        </a:rPr>
+                        <a:t>Depende de entidades, </a:t>
+                      </a:r>
+                      <a:r>
+                        <a:rPr lang="es-ES" sz="1300" kern="1200" noProof="0" dirty="0" err="1">
+                          <a:solidFill>
+                            <a:srgbClr val="374151"/>
+                          </a:solidFill>
+                        </a:rPr>
+                        <a:t>value</a:t>
+                      </a:r>
+                      <a:r>
+                        <a:rPr lang="es-ES" sz="1300" kern="1200" noProof="0" dirty="0">
+                          <a:solidFill>
+                            <a:srgbClr val="374151"/>
+                          </a:solidFill>
+                        </a:rPr>
+                        <a:t> </a:t>
+                      </a:r>
+                      <a:r>
+                        <a:rPr lang="es-ES" sz="1300" kern="1200" noProof="0" dirty="0" err="1">
+                          <a:solidFill>
+                            <a:srgbClr val="374151"/>
+                          </a:solidFill>
+                        </a:rPr>
+                        <a:t>objects</a:t>
+                      </a:r>
+                      <a:endParaRPr lang="es-ES" dirty="0"/>
+                    </a:p>
+                  </a:txBody>
+                  <a:tcPr>
+                    <a:lnL w="12700" cap="flat" cmpd="sng" algn="ctr">
+                      <a:solidFill>
+                        <a:schemeClr val="tx1"/>
+                      </a:solidFill>
+                      <a:prstDash val="solid"/>
+                      <a:round/>
+                      <a:headEnd type="none" w="med" len="med"/>
+                      <a:tailEnd type="none" w="med" len="med"/>
+                    </a:lnL>
+                    <a:lnR w="12700" cap="flat" cmpd="sng" algn="ctr">
+                      <a:solidFill>
+                        <a:schemeClr val="tx1"/>
+                      </a:solidFill>
+                      <a:prstDash val="solid"/>
+                      <a:round/>
+                      <a:headEnd type="none" w="med" len="med"/>
+                      <a:tailEnd type="none" w="med" len="med"/>
+                    </a:lnR>
+                    <a:lnT w="12700" cap="flat" cmpd="sng" algn="ctr">
+                      <a:solidFill>
+                        <a:schemeClr val="tx1"/>
+                      </a:solidFill>
+                      <a:prstDash val="solid"/>
+                      <a:round/>
+                      <a:headEnd type="none" w="med" len="med"/>
+                      <a:tailEnd type="none" w="med" len="med"/>
+                    </a:lnT>
+                    <a:lnB w="12700" cap="flat" cmpd="sng" algn="ctr">
+                      <a:solidFill>
+                        <a:schemeClr val="tx1"/>
+                      </a:solidFill>
+                      <a:prstDash val="solid"/>
+                      <a:round/>
+                      <a:headEnd type="none" w="med" len="med"/>
+                      <a:tailEnd type="none" w="med" len="med"/>
+                    </a:lnB>
+                  </a:tcPr>
+                </a:tc>
+                <a:tc>
+                  <a:txBody>
+                    <a:bodyPr/>
+                    <a:lstStyle/>
+                    <a:p>
+                      <a:pPr marL="0" marR="0" lvl="0" indent="0" algn="l" defTabSz="914400" rtl="0" eaLnBrk="1" fontAlgn="auto" latinLnBrk="0" hangingPunct="1">
+                        <a:lnSpc>
+                          <a:spcPct val="100000"/>
+                        </a:lnSpc>
+                        <a:spcBef>
+                          <a:spcPts val="0"/>
+                        </a:spcBef>
+                        <a:spcAft>
+                          <a:spcPts val="0"/>
+                        </a:spcAft>
+                        <a:buClrTx/>
+                        <a:buSzTx/>
+                        <a:buFontTx/>
+                        <a:buNone/>
+                        <a:tabLst/>
+                        <a:defRPr/>
+                      </a:pPr>
+                      <a:r>
+                        <a:rPr lang="es-ES" sz="1300" kern="1200" noProof="0" dirty="0">
+                          <a:solidFill>
+                            <a:srgbClr val="374151"/>
+                          </a:solidFill>
+                        </a:rPr>
+                        <a:t>Depende de repositorios, infraestructura</a:t>
+                      </a:r>
+                      <a:endParaRPr lang="es-ES" dirty="0"/>
+                    </a:p>
+                  </a:txBody>
+                  <a:tcPr>
+                    <a:lnL w="12700" cap="flat" cmpd="sng" algn="ctr">
+                      <a:solidFill>
+                        <a:schemeClr val="tx1"/>
+                      </a:solidFill>
+                      <a:prstDash val="solid"/>
+                      <a:round/>
+                      <a:headEnd type="none" w="med" len="med"/>
+                      <a:tailEnd type="none" w="med" len="med"/>
+                    </a:lnL>
+                    <a:lnR w="12700" cap="flat" cmpd="sng" algn="ctr">
+                      <a:solidFill>
+                        <a:schemeClr val="tx1"/>
+                      </a:solidFill>
+                      <a:prstDash val="solid"/>
+                      <a:round/>
+                      <a:headEnd type="none" w="med" len="med"/>
+                      <a:tailEnd type="none" w="med" len="med"/>
+                    </a:lnR>
+                    <a:lnT w="12700" cap="flat" cmpd="sng" algn="ctr">
+                      <a:solidFill>
+                        <a:schemeClr val="tx1"/>
+                      </a:solidFill>
+                      <a:prstDash val="solid"/>
+                      <a:round/>
+                      <a:headEnd type="none" w="med" len="med"/>
+                      <a:tailEnd type="none" w="med" len="med"/>
+                    </a:lnT>
+                    <a:lnB w="12700" cap="flat" cmpd="sng" algn="ctr">
+                      <a:solidFill>
+                        <a:schemeClr val="tx1"/>
+                      </a:solidFill>
+                      <a:prstDash val="solid"/>
+                      <a:round/>
+                      <a:headEnd type="none" w="med" len="med"/>
+                      <a:tailEnd type="none" w="med" len="med"/>
+                    </a:lnB>
+                  </a:tcPr>
+                </a:tc>
+                <a:extLst>
+                  <a:ext uri="{0D108BD9-81ED-4DB2-BD59-A6C34878D82A}">
+                    <a16:rowId xmlns:a16="http://schemas.microsoft.com/office/drawing/2014/main" val="165514788"/>
+                  </a:ext>
+                </a:extLst>
+              </a:tr>
+              <a:tr h="348149">
+                <a:tc>
+                  <a:txBody>
+                    <a:bodyPr/>
+                    <a:lstStyle/>
+                    <a:p>
+                      <a:r>
+                        <a:rPr lang="es-ES" sz="1300" kern="1200" dirty="0">
+                          <a:solidFill>
+                            <a:srgbClr val="374151"/>
+                          </a:solidFill>
+                          <a:latin typeface="+mn-lt"/>
+                          <a:ea typeface="+mn-ea"/>
+                          <a:cs typeface="+mn-cs"/>
+                        </a:rPr>
+                        <a:t>Pregunta que responde</a:t>
+                      </a:r>
+                    </a:p>
+                  </a:txBody>
+                  <a:tcPr>
+                    <a:lnL w="12700" cap="flat" cmpd="sng" algn="ctr">
+                      <a:solidFill>
+                        <a:schemeClr val="tx1"/>
+                      </a:solidFill>
+                      <a:prstDash val="solid"/>
+                      <a:round/>
+                      <a:headEnd type="none" w="med" len="med"/>
+                      <a:tailEnd type="none" w="med" len="med"/>
+                    </a:lnL>
+                    <a:lnR w="12700" cap="flat" cmpd="sng" algn="ctr">
+                      <a:solidFill>
+                        <a:schemeClr val="tx1"/>
+                      </a:solidFill>
+                      <a:prstDash val="solid"/>
+                      <a:round/>
+                      <a:headEnd type="none" w="med" len="med"/>
+                      <a:tailEnd type="none" w="med" len="med"/>
+                    </a:lnR>
+                    <a:lnT w="12700" cap="flat" cmpd="sng" algn="ctr">
+                      <a:solidFill>
+                        <a:schemeClr val="tx1"/>
+                      </a:solidFill>
+                      <a:prstDash val="solid"/>
+                      <a:round/>
+                      <a:headEnd type="none" w="med" len="med"/>
+                      <a:tailEnd type="none" w="med" len="med"/>
+                    </a:lnT>
+                    <a:lnB w="12700" cap="flat" cmpd="sng" algn="ctr">
+                      <a:solidFill>
+                        <a:schemeClr val="tx1"/>
+                      </a:solidFill>
+                      <a:prstDash val="solid"/>
+                      <a:round/>
+                      <a:headEnd type="none" w="med" len="med"/>
+                      <a:tailEnd type="none" w="med" len="med"/>
+                    </a:lnB>
+                  </a:tcPr>
+                </a:tc>
+                <a:tc>
+                  <a:txBody>
+                    <a:bodyPr/>
+                    <a:lstStyle/>
+                    <a:p>
+                      <a:pPr marL="0" marR="0" lvl="0" indent="0" algn="l" defTabSz="914400" rtl="0" eaLnBrk="1" fontAlgn="auto" latinLnBrk="0" hangingPunct="1">
+                        <a:lnSpc>
+                          <a:spcPct val="100000"/>
+                        </a:lnSpc>
+                        <a:spcBef>
+                          <a:spcPts val="0"/>
+                        </a:spcBef>
+                        <a:spcAft>
+                          <a:spcPts val="0"/>
+                        </a:spcAft>
+                        <a:buClrTx/>
+                        <a:buSzTx/>
+                        <a:buFontTx/>
+                        <a:buNone/>
+                        <a:tabLst/>
+                        <a:defRPr/>
+                      </a:pPr>
+                      <a:r>
+                        <a:rPr lang="es-ES" sz="1300" kern="1200" noProof="0" dirty="0">
+                          <a:solidFill>
+                            <a:srgbClr val="374151"/>
+                          </a:solidFill>
+                        </a:rPr>
+                        <a:t>¿Cómo decide el dominio esto?</a:t>
+                      </a:r>
+                      <a:endParaRPr lang="es-ES" dirty="0"/>
+                    </a:p>
+                  </a:txBody>
+                  <a:tcPr>
+                    <a:lnL w="12700" cap="flat" cmpd="sng" algn="ctr">
+                      <a:solidFill>
+                        <a:schemeClr val="tx1"/>
+                      </a:solidFill>
+                      <a:prstDash val="solid"/>
+                      <a:round/>
+                      <a:headEnd type="none" w="med" len="med"/>
+                      <a:tailEnd type="none" w="med" len="med"/>
+                    </a:lnL>
+                    <a:lnR w="12700" cap="flat" cmpd="sng" algn="ctr">
+                      <a:solidFill>
+                        <a:schemeClr val="tx1"/>
+                      </a:solidFill>
+                      <a:prstDash val="solid"/>
+                      <a:round/>
+                      <a:headEnd type="none" w="med" len="med"/>
+                      <a:tailEnd type="none" w="med" len="med"/>
+                    </a:lnR>
+                    <a:lnT w="12700" cap="flat" cmpd="sng" algn="ctr">
+                      <a:solidFill>
+                        <a:schemeClr val="tx1"/>
+                      </a:solidFill>
+                      <a:prstDash val="solid"/>
+                      <a:round/>
+                      <a:headEnd type="none" w="med" len="med"/>
+                      <a:tailEnd type="none" w="med" len="med"/>
+                    </a:lnT>
+                    <a:lnB w="12700" cap="flat" cmpd="sng" algn="ctr">
+                      <a:solidFill>
+                        <a:schemeClr val="tx1"/>
+                      </a:solidFill>
+                      <a:prstDash val="solid"/>
+                      <a:round/>
+                      <a:headEnd type="none" w="med" len="med"/>
+                      <a:tailEnd type="none" w="med" len="med"/>
+                    </a:lnB>
+                  </a:tcPr>
+                </a:tc>
+                <a:tc>
+                  <a:txBody>
+                    <a:bodyPr/>
+                    <a:lstStyle/>
+                    <a:p>
+                      <a:pPr marL="0" marR="0" lvl="0" indent="0" algn="l" defTabSz="914400" rtl="0" eaLnBrk="1" fontAlgn="auto" latinLnBrk="0" hangingPunct="1">
+                        <a:lnSpc>
+                          <a:spcPct val="100000"/>
+                        </a:lnSpc>
+                        <a:spcBef>
+                          <a:spcPts val="0"/>
+                        </a:spcBef>
+                        <a:spcAft>
+                          <a:spcPts val="0"/>
+                        </a:spcAft>
+                        <a:buClrTx/>
+                        <a:buSzTx/>
+                        <a:buFontTx/>
+                        <a:buNone/>
+                        <a:tabLst/>
+                        <a:defRPr/>
+                      </a:pPr>
+                      <a:r>
+                        <a:rPr lang="es-ES" sz="1300" kern="1200" noProof="0" dirty="0">
+                          <a:solidFill>
+                            <a:srgbClr val="374151"/>
+                          </a:solidFill>
+                        </a:rPr>
+                        <a:t>¿Cómo ejecuto este caso de uso?</a:t>
+                      </a:r>
+                      <a:endParaRPr lang="es-ES" dirty="0"/>
+                    </a:p>
+                  </a:txBody>
+                  <a:tcPr>
+                    <a:lnL w="12700" cap="flat" cmpd="sng" algn="ctr">
+                      <a:solidFill>
+                        <a:schemeClr val="tx1"/>
+                      </a:solidFill>
+                      <a:prstDash val="solid"/>
+                      <a:round/>
+                      <a:headEnd type="none" w="med" len="med"/>
+                      <a:tailEnd type="none" w="med" len="med"/>
+                    </a:lnL>
+                    <a:lnR w="12700" cap="flat" cmpd="sng" algn="ctr">
+                      <a:solidFill>
+                        <a:schemeClr val="tx1"/>
+                      </a:solidFill>
+                      <a:prstDash val="solid"/>
+                      <a:round/>
+                      <a:headEnd type="none" w="med" len="med"/>
+                      <a:tailEnd type="none" w="med" len="med"/>
+                    </a:lnR>
+                    <a:lnT w="12700" cap="flat" cmpd="sng" algn="ctr">
+                      <a:solidFill>
+                        <a:schemeClr val="tx1"/>
+                      </a:solidFill>
+                      <a:prstDash val="solid"/>
+                      <a:round/>
+                      <a:headEnd type="none" w="med" len="med"/>
+                      <a:tailEnd type="none" w="med" len="med"/>
+                    </a:lnT>
+                    <a:lnB w="12700" cap="flat" cmpd="sng" algn="ctr">
+                      <a:solidFill>
+                        <a:schemeClr val="tx1"/>
+                      </a:solidFill>
+                      <a:prstDash val="solid"/>
+                      <a:round/>
+                      <a:headEnd type="none" w="med" len="med"/>
+                      <a:tailEnd type="none" w="med" len="med"/>
+                    </a:lnB>
+                  </a:tcPr>
+                </a:tc>
+                <a:extLst>
+                  <a:ext uri="{0D108BD9-81ED-4DB2-BD59-A6C34878D82A}">
+                    <a16:rowId xmlns:a16="http://schemas.microsoft.com/office/drawing/2014/main" val="1785567511"/>
+                  </a:ext>
+                </a:extLst>
+              </a:tr>
+            </a:tbl>
+          </a:graphicData>
+        </a:graphic>
+      </p:graphicFrame>
+      <p:sp>
+        <p:nvSpPr>
+          <p:cNvPr id="10" name="CuadroTexto 9">
+            <a:extLst>
+              <a:ext uri="{FF2B5EF4-FFF2-40B4-BE49-F238E27FC236}">
+                <a16:creationId xmlns:a16="http://schemas.microsoft.com/office/drawing/2014/main" id="{CD3083DF-D934-0F99-E086-19710DAC2D02}"/>
               </a:ext>
             </a:extLst>
           </p:cNvPr>
@@ -4994,7 +6710,193 @@
         </p:nvSpPr>
         <p:spPr>
           <a:xfrm>
-            <a:off x="762000" y="1714500"/>
+            <a:off x="715819" y="3742265"/>
+            <a:ext cx="8696036" cy="2308324"/>
+          </a:xfrm>
+          <a:prstGeom prst="rect">
+            <a:avLst/>
+          </a:prstGeom>
+          <a:noFill/>
+        </p:spPr>
+        <p:txBody>
+          <a:bodyPr wrap="square" rtlCol="0">
+            <a:spAutoFit/>
+          </a:bodyPr>
+          <a:lstStyle/>
+          <a:p>
+            <a:r>
+              <a:rPr lang="es-ES" b="1" dirty="0"/>
+              <a:t>Cuando usar cada uno</a:t>
+            </a:r>
+          </a:p>
+          <a:p>
+            <a:r>
+              <a:rPr lang="es-ES" sz="1200" dirty="0"/>
+              <a:t>Usa un </a:t>
+            </a:r>
+            <a:r>
+              <a:rPr lang="es-ES" sz="1200" b="1" dirty="0"/>
+              <a:t>servicio</a:t>
+            </a:r>
+            <a:r>
+              <a:rPr lang="es-ES" sz="1200" dirty="0"/>
+              <a:t> de </a:t>
+            </a:r>
+            <a:r>
+              <a:rPr lang="es-ES" sz="1200" b="1" dirty="0"/>
+              <a:t>dominio</a:t>
+            </a:r>
+            <a:r>
+              <a:rPr lang="es-ES" sz="1200" dirty="0"/>
+              <a:t> cuando:</a:t>
+            </a:r>
+          </a:p>
+          <a:p>
+            <a:pPr marL="171450" lvl="0" indent="-171450">
+              <a:buFont typeface="Arial" panose="020B0604020202020204" pitchFamily="34" charset="0"/>
+              <a:buChar char="•"/>
+            </a:pPr>
+            <a:r>
+              <a:rPr lang="es-ES" sz="1200" dirty="0"/>
+              <a:t>La lógica no pertenece de forma natural a una sola entidad.</a:t>
+            </a:r>
+          </a:p>
+          <a:p>
+            <a:pPr marL="171450" lvl="0" indent="-171450">
+              <a:buFont typeface="Arial" panose="020B0604020202020204" pitchFamily="34" charset="0"/>
+              <a:buChar char="•"/>
+            </a:pPr>
+            <a:r>
+              <a:rPr lang="es-ES" sz="1200" dirty="0"/>
+              <a:t>La operación combina varios objetos del dominio.</a:t>
+            </a:r>
+          </a:p>
+          <a:p>
+            <a:pPr marL="171450" lvl="0" indent="-171450">
+              <a:buFont typeface="Arial" panose="020B0604020202020204" pitchFamily="34" charset="0"/>
+              <a:buChar char="•"/>
+            </a:pPr>
+            <a:r>
+              <a:rPr lang="es-ES" sz="1200" dirty="0"/>
+              <a:t>La regla es del negocio y debería ser reutilizable en distintos casos de uso.</a:t>
+            </a:r>
+          </a:p>
+          <a:p>
+            <a:r>
+              <a:rPr lang="es-ES" sz="1200" dirty="0"/>
+              <a:t> </a:t>
+            </a:r>
+          </a:p>
+          <a:p>
+            <a:r>
+              <a:rPr lang="es-ES" sz="1200" dirty="0"/>
+              <a:t>Usa un </a:t>
+            </a:r>
+            <a:r>
+              <a:rPr lang="es-ES" sz="1200" b="1" dirty="0"/>
+              <a:t>servicio</a:t>
+            </a:r>
+            <a:r>
+              <a:rPr lang="es-ES" sz="1200" dirty="0"/>
+              <a:t> de </a:t>
+            </a:r>
+            <a:r>
+              <a:rPr lang="es-ES" sz="1200" b="1" dirty="0"/>
+              <a:t>aplicación</a:t>
+            </a:r>
+            <a:r>
+              <a:rPr lang="es-ES" sz="1200" dirty="0"/>
+              <a:t> cuando:</a:t>
+            </a:r>
+          </a:p>
+          <a:p>
+            <a:pPr marL="171450" lvl="0" indent="-171450">
+              <a:buFont typeface="Arial" panose="020B0604020202020204" pitchFamily="34" charset="0"/>
+              <a:buChar char="•"/>
+            </a:pPr>
+            <a:r>
+              <a:rPr lang="es-ES" sz="1200" dirty="0"/>
+              <a:t>Estás implementando un caso de uso concreto.</a:t>
+            </a:r>
+          </a:p>
+          <a:p>
+            <a:pPr marL="171450" lvl="0" indent="-171450">
+              <a:buFont typeface="Arial" panose="020B0604020202020204" pitchFamily="34" charset="0"/>
+              <a:buChar char="•"/>
+            </a:pPr>
+            <a:r>
+              <a:rPr lang="es-ES" sz="1200" dirty="0"/>
+              <a:t>Necesitas coordinar repositorios, validaciones, transacciones o llamadas a otros servicios.</a:t>
+            </a:r>
+          </a:p>
+          <a:p>
+            <a:pPr marL="171450" lvl="0" indent="-171450">
+              <a:buFont typeface="Arial" panose="020B0604020202020204" pitchFamily="34" charset="0"/>
+              <a:buChar char="•"/>
+            </a:pPr>
+            <a:r>
+              <a:rPr lang="es-ES" sz="1200" dirty="0"/>
+              <a:t>El objetivo principal es orquestar, no decidir reglas de negocio.</a:t>
+            </a:r>
+          </a:p>
+          <a:p>
+            <a:endParaRPr lang="es-ES" dirty="0"/>
+          </a:p>
+        </p:txBody>
+      </p:sp>
+    </p:spTree>
+    <p:extLst>
+      <p:ext uri="{BB962C8B-B14F-4D97-AF65-F5344CB8AC3E}">
+        <p14:creationId xmlns:p14="http://schemas.microsoft.com/office/powerpoint/2010/main" val="2368882804"/>
+      </p:ext>
+    </p:extLst>
+  </p:cSld>
+  <p:clrMapOvr>
+    <a:masterClrMapping/>
+  </p:clrMapOvr>
+</p:sld>
+</file>
+
+<file path=ppt/slides/slide13.xml><?xml version="1.0" encoding="utf-8"?>
+<p:sld xmlns:a="http://schemas.openxmlformats.org/drawingml/2006/main" xmlns:r="http://schemas.openxmlformats.org/officeDocument/2006/relationships" xmlns:p="http://schemas.openxmlformats.org/presentationml/2006/main">
+  <p:cSld>
+    <p:bg>
+      <p:bgPr>
+        <a:solidFill>
+          <a:srgbClr val="FFFFFF"/>
+        </a:solidFill>
+        <a:effectLst/>
+      </p:bgPr>
+    </p:bg>
+    <p:spTree>
+      <p:nvGrpSpPr>
+        <p:cNvPr id="1" name=""/>
+        <p:cNvGrpSpPr/>
+        <p:nvPr/>
+      </p:nvGrpSpPr>
+      <p:grpSpPr>
+        <a:xfrm>
+          <a:off x="0" y="0"/>
+          <a:ext cx="0" cy="0"/>
+          <a:chOff x="0" y="0"/>
+          <a:chExt cx="0" cy="0"/>
+        </a:xfrm>
+      </p:grpSpPr>
+      <p:sp>
+        <p:nvSpPr>
+          <p:cNvPr id="2" name="CuadroTexto 1">
+            <a:extLst>
+              <a:ext uri="{FF2B5EF4-FFF2-40B4-BE49-F238E27FC236}">
+                <a16:creationId xmlns:a16="http://schemas.microsoft.com/office/drawing/2014/main" id="{A6B39EC9-04F5-BC57-37C9-F855CB95C09A}"/>
+              </a:ext>
+            </a:extLst>
+          </p:cNvPr>
+          <p:cNvSpPr txBox="1"/>
+          <p:nvPr/>
+        </p:nvSpPr>
+        <p:spPr>
+          <a:xfrm>
+            <a:off x="762000" y="381000"/>
             <a:ext cx="10668000" cy="369332"/>
           </a:xfrm>
           <a:prstGeom prst="rect">
@@ -5008,74 +6910,91 @@
           </a:bodyPr>
           <a:lstStyle/>
           <a:p>
-            <a:pPr indent="-285750">
-              <a:spcAft>
-                <a:spcPts val="600"/>
-              </a:spcAft>
-              <a:buChar char="•"/>
-            </a:pPr>
-            <a:r>
-              <a:rPr lang="es-ES" sz="1400" noProof="0" dirty="0">
-                <a:solidFill>
-                  <a:srgbClr val="374151"/>
-                </a:solidFill>
-              </a:rPr>
-              <a:t>Encapsula una consulta específica de lectura como un objeto reutilizable</a:t>
-            </a:r>
-          </a:p>
-          <a:p>
-            <a:pPr indent="-285750">
-              <a:spcAft>
-                <a:spcPts val="600"/>
-              </a:spcAft>
-              <a:buChar char="•"/>
-            </a:pPr>
-            <a:r>
-              <a:rPr lang="es-ES" sz="1400" noProof="0" dirty="0">
-                <a:solidFill>
-                  <a:srgbClr val="374151"/>
-                </a:solidFill>
-              </a:rPr>
-              <a:t>El objeto de criterio/consulta vive en la capa de Dominio</a:t>
-            </a:r>
-          </a:p>
-          <a:p>
-            <a:pPr indent="-285750">
-              <a:spcAft>
-                <a:spcPts val="600"/>
-              </a:spcAft>
-              <a:buChar char="•"/>
-            </a:pPr>
-            <a:r>
-              <a:rPr lang="es-ES" sz="1400" noProof="0" dirty="0">
-                <a:solidFill>
-                  <a:srgbClr val="374151"/>
-                </a:solidFill>
-              </a:rPr>
-              <a:t>En Aplicación solo mapeas tu DTO al Query </a:t>
-            </a:r>
-            <a:r>
-              <a:rPr lang="es-ES" sz="1400" noProof="0" dirty="0" err="1">
-                <a:solidFill>
-                  <a:srgbClr val="374151"/>
-                </a:solidFill>
-              </a:rPr>
-              <a:t>Object</a:t>
-            </a:r>
-            <a:endParaRPr lang="es-ES" sz="1400" noProof="0" dirty="0">
-              <a:solidFill>
-                <a:srgbClr val="374151"/>
-              </a:solidFill>
-            </a:endParaRPr>
-          </a:p>
-        </p:txBody>
-      </p:sp>
-      <p:sp>
-        <p:nvSpPr>
-          <p:cNvPr id="6" name="CuadroTexto 5">
-            <a:extLst>
-              <a:ext uri="{FF2B5EF4-FFF2-40B4-BE49-F238E27FC236}">
-                <a16:creationId xmlns:a16="http://schemas.microsoft.com/office/drawing/2014/main" id="{1655BB5B-107F-76BD-39A2-5513DB73C10B}"/>
+            <a:r>
+              <a:rPr lang="es-ES" sz="3000" b="1" noProof="0" dirty="0">
+                <a:solidFill>
+                  <a:srgbClr val="172554"/>
+                </a:solidFill>
+              </a:rPr>
+              <a:t>Patrones de Diseño en DDD</a:t>
+            </a:r>
+          </a:p>
+        </p:txBody>
+      </p:sp>
+      <p:sp>
+        <p:nvSpPr>
+          <p:cNvPr id="3" name="Rectángulo 2">
+            <a:extLst>
+              <a:ext uri="{FF2B5EF4-FFF2-40B4-BE49-F238E27FC236}">
+                <a16:creationId xmlns:a16="http://schemas.microsoft.com/office/drawing/2014/main" id="{EB338CAC-79C3-2ADE-5B0C-DDA164555B31}"/>
+              </a:ext>
+            </a:extLst>
+          </p:cNvPr>
+          <p:cNvSpPr/>
+          <p:nvPr/>
+        </p:nvSpPr>
+        <p:spPr>
+          <a:xfrm flipV="1">
+            <a:off x="762000" y="970281"/>
+            <a:ext cx="4998720" cy="45719"/>
+          </a:xfrm>
+          <a:prstGeom prst="rect">
+            <a:avLst/>
+          </a:prstGeom>
+          <a:solidFill>
+            <a:srgbClr val="2563EB"/>
+          </a:solidFill>
+          <a:ln w="19050" cap="flat" cmpd="sng" algn="ctr">
+            <a:noFill/>
+            <a:prstDash val="solid"/>
+            <a:miter lim="800000"/>
+          </a:ln>
+          <a:effectLst/>
+          <a:extLst>
+            <a:ext uri="{91240B29-F687-4F45-9708-019B960494DF}">
+              <a14:hiddenLine xmlns:a14="http://schemas.microsoft.com/office/drawing/2010/main" w="19050" cap="flat" cmpd="sng" algn="ctr">
+                <a:solidFill>
+                  <a:schemeClr val="accent1">
+                    <a:shade val="15000"/>
+                  </a:schemeClr>
+                </a:solidFill>
+                <a:prstDash val="solid"/>
+                <a:miter lim="800000"/>
+              </a14:hiddenLine>
+            </a:ext>
+          </a:extLst>
+        </p:spPr>
+        <p:style>
+          <a:lnRef idx="2">
+            <a:schemeClr val="accent1">
+              <a:shade val="15000"/>
+            </a:schemeClr>
+          </a:lnRef>
+          <a:fillRef idx="1">
+            <a:schemeClr val="accent1"/>
+          </a:fillRef>
+          <a:effectRef idx="0">
+            <a:schemeClr val="accent1"/>
+          </a:effectRef>
+          <a:fontRef idx="minor">
+            <a:schemeClr val="lt1"/>
+          </a:fontRef>
+        </p:style>
+        <p:txBody>
+          <a:bodyPr rtlCol="0" anchor="ctr"/>
+          <a:lstStyle/>
+          <a:p>
+            <a:pPr algn="ctr"/>
+            <a:endParaRPr lang="es-ES" noProof="0" dirty="0"/>
+          </a:p>
+        </p:txBody>
+      </p:sp>
+      <p:sp>
+        <p:nvSpPr>
+          <p:cNvPr id="4" name="CuadroTexto 3">
+            <a:extLst>
+              <a:ext uri="{FF2B5EF4-FFF2-40B4-BE49-F238E27FC236}">
+                <a16:creationId xmlns:a16="http://schemas.microsoft.com/office/drawing/2014/main" id="{E13D4B08-DBED-F1CB-2AAD-555F427892EC}"/>
               </a:ext>
             </a:extLst>
           </p:cNvPr>
@@ -5084,8 +7003,8 @@
         </p:nvSpPr>
         <p:spPr>
           <a:xfrm>
-            <a:off x="762000" y="3302000"/>
-            <a:ext cx="10668000" cy="381000"/>
+            <a:off x="762000" y="1269999"/>
+            <a:ext cx="10668000" cy="1102591"/>
           </a:xfrm>
           <a:prstGeom prst="rect">
             <a:avLst/>
@@ -5098,23 +7017,45 @@
           </a:bodyPr>
           <a:lstStyle/>
           <a:p>
+            <a:pPr>
+              <a:spcAft>
+                <a:spcPts val="1200"/>
+              </a:spcAft>
+            </a:pPr>
             <a:r>
               <a:rPr lang="es-ES" sz="2000" b="1" noProof="0" dirty="0">
                 <a:solidFill>
                   <a:srgbClr val="7C3AED"/>
                 </a:solidFill>
               </a:rPr>
-              <a:t>Specification</a:t>
-            </a:r>
-          </a:p>
-        </p:txBody>
-      </p:sp>
-      <p:sp>
-        <p:nvSpPr>
-          <p:cNvPr id="7" name="CuadroTexto 6">
-            <a:extLst>
-              <a:ext uri="{FF2B5EF4-FFF2-40B4-BE49-F238E27FC236}">
-                <a16:creationId xmlns:a16="http://schemas.microsoft.com/office/drawing/2014/main" id="{52031E4B-34AD-90C4-E5D1-E16FB92C22AA}"/>
+              <a:t>Query Object</a:t>
+            </a:r>
+          </a:p>
+          <a:p>
+            <a:r>
+              <a:rPr lang="es-ES" sz="1400" dirty="0">
+                <a:solidFill>
+                  <a:srgbClr val="374151"/>
+                </a:solidFill>
+              </a:rPr>
+              <a:t>Un Query Object en DDD es un patrón de diseño que encapsula una consulta específica (de lectura) a un repositorio, expresándola como un objeto reutilizable en lugar de un montón de lógica de filtro dispersa por todo el código.</a:t>
+            </a:r>
+          </a:p>
+          <a:p>
+            <a:endParaRPr lang="es-ES" sz="2000" b="1" noProof="0" dirty="0">
+              <a:solidFill>
+                <a:srgbClr val="7C3AED"/>
+              </a:solidFill>
+            </a:endParaRPr>
+          </a:p>
+        </p:txBody>
+      </p:sp>
+      <p:sp>
+        <p:nvSpPr>
+          <p:cNvPr id="5" name="CuadroTexto 4">
+            <a:extLst>
+              <a:ext uri="{FF2B5EF4-FFF2-40B4-BE49-F238E27FC236}">
+                <a16:creationId xmlns:a16="http://schemas.microsoft.com/office/drawing/2014/main" id="{60714F55-F968-6223-7DA9-0981959857F0}"/>
               </a:ext>
             </a:extLst>
           </p:cNvPr>
@@ -5123,8 +7064,8 @@
         </p:nvSpPr>
         <p:spPr>
           <a:xfrm>
-            <a:off x="762000" y="3746500"/>
-            <a:ext cx="10668000" cy="369332"/>
+            <a:off x="762000" y="2610427"/>
+            <a:ext cx="10668000" cy="1425864"/>
           </a:xfrm>
           <a:prstGeom prst="rect">
             <a:avLst/>
@@ -5137,100 +7078,201 @@
           </a:bodyPr>
           <a:lstStyle/>
           <a:p>
-            <a:pPr indent="-285750">
+            <a:pPr lvl="0">
+              <a:spcAft>
+                <a:spcPts val="1200"/>
+              </a:spcAft>
+            </a:pPr>
+            <a:r>
+              <a:rPr lang="es-ES" sz="1400" dirty="0">
+                <a:solidFill>
+                  <a:srgbClr val="374151"/>
+                </a:solidFill>
+              </a:rPr>
+              <a:t>Si quieres utilizar Query Object en DDD:</a:t>
+            </a:r>
+          </a:p>
+          <a:p>
+            <a:pPr marL="285750" lvl="0" indent="-285750">
+              <a:buFont typeface="Arial" panose="020B0604020202020204" pitchFamily="34" charset="0"/>
+              <a:buChar char="•"/>
+            </a:pPr>
+            <a:r>
+              <a:rPr lang="es-ES" sz="1400" dirty="0">
+                <a:solidFill>
+                  <a:srgbClr val="374151"/>
+                </a:solidFill>
+              </a:rPr>
+              <a:t>El </a:t>
+            </a:r>
+            <a:r>
+              <a:rPr lang="es-ES" sz="1400" b="1" dirty="0">
+                <a:solidFill>
+                  <a:srgbClr val="374151"/>
+                </a:solidFill>
+              </a:rPr>
+              <a:t>objeto de criterio/consult</a:t>
+            </a:r>
+            <a:r>
+              <a:rPr lang="es-ES" sz="1400" dirty="0">
+                <a:solidFill>
+                  <a:srgbClr val="374151"/>
+                </a:solidFill>
+              </a:rPr>
+              <a:t>a vive en </a:t>
+            </a:r>
+            <a:r>
+              <a:rPr lang="es-ES" sz="1400" b="1" dirty="0">
+                <a:solidFill>
+                  <a:srgbClr val="374151"/>
+                </a:solidFill>
+              </a:rPr>
+              <a:t>Domain</a:t>
+            </a:r>
+            <a:r>
+              <a:rPr lang="es-ES" sz="1400" dirty="0">
+                <a:solidFill>
+                  <a:srgbClr val="374151"/>
+                </a:solidFill>
+              </a:rPr>
+              <a:t> </a:t>
+            </a:r>
+          </a:p>
+          <a:p>
+            <a:pPr marL="285750" lvl="0" indent="-285750">
+              <a:buFont typeface="Arial" panose="020B0604020202020204" pitchFamily="34" charset="0"/>
+              <a:buChar char="•"/>
+            </a:pPr>
+            <a:r>
+              <a:rPr lang="es-ES" sz="1400" dirty="0">
+                <a:solidFill>
+                  <a:srgbClr val="374151"/>
+                </a:solidFill>
+              </a:rPr>
+              <a:t>El </a:t>
+            </a:r>
+            <a:r>
+              <a:rPr lang="es-ES" sz="1400" b="1" dirty="0">
+                <a:solidFill>
+                  <a:srgbClr val="374151"/>
+                </a:solidFill>
+              </a:rPr>
+              <a:t>repositorio</a:t>
+            </a:r>
+            <a:r>
+              <a:rPr lang="es-ES" sz="1400" dirty="0">
+                <a:solidFill>
+                  <a:srgbClr val="374151"/>
+                </a:solidFill>
+              </a:rPr>
+              <a:t> solo dependa de ese objeto de dominio; </a:t>
+            </a:r>
+            <a:r>
+              <a:rPr lang="es-ES" sz="1400" b="1" dirty="0">
+                <a:solidFill>
+                  <a:srgbClr val="374151"/>
+                </a:solidFill>
+              </a:rPr>
+              <a:t>no de </a:t>
+            </a:r>
+            <a:r>
+              <a:rPr lang="es-ES" sz="1400" b="1" dirty="0" err="1">
+                <a:solidFill>
+                  <a:srgbClr val="374151"/>
+                </a:solidFill>
+              </a:rPr>
+              <a:t>DTOs</a:t>
+            </a:r>
+            <a:r>
+              <a:rPr lang="es-ES" sz="1400" b="1" dirty="0">
+                <a:solidFill>
+                  <a:srgbClr val="374151"/>
+                </a:solidFill>
+              </a:rPr>
+              <a:t> o </a:t>
+            </a:r>
+            <a:r>
+              <a:rPr lang="es-ES" sz="1400" b="1" dirty="0" err="1">
+                <a:solidFill>
+                  <a:srgbClr val="374151"/>
+                </a:solidFill>
+              </a:rPr>
+              <a:t>queries</a:t>
+            </a:r>
+            <a:r>
+              <a:rPr lang="es-ES" sz="1400" b="1" dirty="0">
+                <a:solidFill>
+                  <a:srgbClr val="374151"/>
+                </a:solidFill>
+              </a:rPr>
+              <a:t> de la capa de aplicación</a:t>
+            </a:r>
+            <a:r>
+              <a:rPr lang="es-ES" sz="1400" dirty="0">
+                <a:solidFill>
+                  <a:srgbClr val="374151"/>
+                </a:solidFill>
+              </a:rPr>
+              <a:t>.</a:t>
+            </a:r>
+          </a:p>
+          <a:p>
+            <a:pPr marL="285750" lvl="0" indent="-285750">
+              <a:buFont typeface="Arial" panose="020B0604020202020204" pitchFamily="34" charset="0"/>
+              <a:buChar char="•"/>
+            </a:pPr>
+            <a:r>
+              <a:rPr lang="es-ES" sz="1400" dirty="0">
+                <a:solidFill>
+                  <a:srgbClr val="374151"/>
+                </a:solidFill>
+              </a:rPr>
+              <a:t>En </a:t>
+            </a:r>
+            <a:r>
+              <a:rPr lang="es-ES" sz="1400" b="1" dirty="0">
+                <a:solidFill>
+                  <a:srgbClr val="374151"/>
+                </a:solidFill>
+              </a:rPr>
+              <a:t>Aplicación</a:t>
+            </a:r>
+            <a:r>
+              <a:rPr lang="es-ES" sz="1400" dirty="0">
+                <a:solidFill>
+                  <a:srgbClr val="374151"/>
+                </a:solidFill>
+              </a:rPr>
+              <a:t> solo mapeas tu </a:t>
+            </a:r>
+            <a:r>
+              <a:rPr lang="es-ES" sz="1400" b="1" dirty="0">
+                <a:solidFill>
+                  <a:srgbClr val="374151"/>
+                </a:solidFill>
+              </a:rPr>
+              <a:t>DTO</a:t>
+            </a:r>
+            <a:r>
+              <a:rPr lang="es-ES" sz="1400" dirty="0">
+                <a:solidFill>
+                  <a:srgbClr val="374151"/>
+                </a:solidFill>
+              </a:rPr>
+              <a:t> a tu Query Object.</a:t>
+            </a:r>
+          </a:p>
+          <a:p>
+            <a:pPr>
               <a:spcAft>
                 <a:spcPts val="600"/>
               </a:spcAft>
-              <a:buChar char="•"/>
             </a:pPr>
-            <a:r>
-              <a:rPr lang="es-ES" sz="1400" noProof="0" dirty="0">
-                <a:solidFill>
-                  <a:srgbClr val="374151"/>
-                </a:solidFill>
-              </a:rPr>
-              <a:t>Encapsula reglas de negocio o filtros como objetos reutilizables</a:t>
-            </a:r>
-          </a:p>
-          <a:p>
-            <a:pPr indent="-285750">
-              <a:spcAft>
-                <a:spcPts val="600"/>
-              </a:spcAft>
-              <a:buChar char="•"/>
-            </a:pPr>
-            <a:r>
-              <a:rPr lang="es-ES" sz="1400" noProof="0" dirty="0">
-                <a:solidFill>
-                  <a:srgbClr val="374151"/>
-                </a:solidFill>
-              </a:rPr>
-              <a:t>Sirve para consultas, validaciones y reglas del dominio</a:t>
-            </a:r>
-          </a:p>
-          <a:p>
-            <a:pPr indent="-285750">
-              <a:spcAft>
-                <a:spcPts val="600"/>
-              </a:spcAft>
-              <a:buChar char="•"/>
-            </a:pPr>
-            <a:r>
-              <a:rPr lang="es-ES" sz="1400" noProof="0" dirty="0">
-                <a:solidFill>
-                  <a:srgbClr val="374151"/>
-                </a:solidFill>
-              </a:rPr>
-              <a:t>Usa expresiones LINQ para funcionar con EF Core sin SQL crudo</a:t>
-            </a:r>
-          </a:p>
-          <a:p>
-            <a:pPr indent="-285750">
-              <a:spcAft>
-                <a:spcPts val="600"/>
-              </a:spcAft>
-              <a:buChar char="•"/>
-            </a:pPr>
-            <a:r>
-              <a:rPr lang="es-ES" sz="1400" noProof="0" dirty="0">
-                <a:solidFill>
-                  <a:srgbClr val="374151"/>
-                </a:solidFill>
-              </a:rPr>
-              <a:t>Vive en la capa de dominio para mantener reglas puras y expresivas</a:t>
-            </a:r>
-          </a:p>
-          <a:p>
-            <a:pPr indent="-285750">
-              <a:spcAft>
-                <a:spcPts val="600"/>
-              </a:spcAft>
-              <a:buChar char="•"/>
-            </a:pPr>
-            <a:r>
-              <a:rPr lang="es-ES" sz="1400" noProof="0" dirty="0">
-                <a:solidFill>
-                  <a:srgbClr val="374151"/>
-                </a:solidFill>
-              </a:rPr>
-              <a:t>Evita explosión de mu{00e9}todos en repositorios</a:t>
-            </a:r>
-          </a:p>
-          <a:p>
-            <a:pPr indent="-285750">
-              <a:spcAft>
-                <a:spcPts val="600"/>
-              </a:spcAft>
-              <a:buChar char="•"/>
-            </a:pPr>
-            <a:r>
-              <a:rPr lang="es-ES" sz="1400" noProof="0" dirty="0">
-                <a:solidFill>
-                  <a:srgbClr val="374151"/>
-                </a:solidFill>
-              </a:rPr>
-              <a:t>Se combina con operadores AND/OR/NOT para reglas complejas</a:t>
-            </a:r>
+            <a:endParaRPr lang="es-ES" sz="1400" noProof="0" dirty="0">
+              <a:solidFill>
+                <a:srgbClr val="374151"/>
+              </a:solidFill>
+            </a:endParaRPr>
           </a:p>
         </p:txBody>
       </p:sp>
@@ -5247,7 +7289,576 @@
 </p:sld>
 </file>
 
-<file path=ppt/slides/slide12.xml><?xml version="1.0" encoding="utf-8"?>
+<file path=ppt/slides/slide14.xml><?xml version="1.0" encoding="utf-8"?>
+<p:sld xmlns:a="http://schemas.openxmlformats.org/drawingml/2006/main" xmlns:r="http://schemas.openxmlformats.org/officeDocument/2006/relationships" xmlns:p="http://schemas.openxmlformats.org/presentationml/2006/main">
+  <p:cSld>
+    <p:bg>
+      <p:bgPr>
+        <a:solidFill>
+          <a:srgbClr val="FFFFFF"/>
+        </a:solidFill>
+        <a:effectLst/>
+      </p:bgPr>
+    </p:bg>
+    <p:spTree>
+      <p:nvGrpSpPr>
+        <p:cNvPr id="1" name="">
+          <a:extLst>
+            <a:ext uri="{FF2B5EF4-FFF2-40B4-BE49-F238E27FC236}">
+              <a16:creationId xmlns:a16="http://schemas.microsoft.com/office/drawing/2014/main" id="{F630A188-538C-6930-9B81-CECD1D373C82}"/>
+            </a:ext>
+          </a:extLst>
+        </p:cNvPr>
+        <p:cNvGrpSpPr/>
+        <p:nvPr/>
+      </p:nvGrpSpPr>
+      <p:grpSpPr>
+        <a:xfrm>
+          <a:off x="0" y="0"/>
+          <a:ext cx="0" cy="0"/>
+          <a:chOff x="0" y="0"/>
+          <a:chExt cx="0" cy="0"/>
+        </a:xfrm>
+      </p:grpSpPr>
+      <p:sp>
+        <p:nvSpPr>
+          <p:cNvPr id="2" name="CuadroTexto 1">
+            <a:extLst>
+              <a:ext uri="{FF2B5EF4-FFF2-40B4-BE49-F238E27FC236}">
+                <a16:creationId xmlns:a16="http://schemas.microsoft.com/office/drawing/2014/main" id="{C8576911-9103-466B-7193-229B9C80BC96}"/>
+              </a:ext>
+            </a:extLst>
+          </p:cNvPr>
+          <p:cNvSpPr txBox="1"/>
+          <p:nvPr/>
+        </p:nvSpPr>
+        <p:spPr>
+          <a:xfrm>
+            <a:off x="762000" y="381000"/>
+            <a:ext cx="10668000" cy="369332"/>
+          </a:xfrm>
+          <a:prstGeom prst="rect">
+            <a:avLst/>
+          </a:prstGeom>
+          <a:noFill/>
+        </p:spPr>
+        <p:txBody>
+          <a:bodyPr vert="horz" wrap="square" rtlCol="0">
+            <a:noAutofit/>
+          </a:bodyPr>
+          <a:lstStyle/>
+          <a:p>
+            <a:r>
+              <a:rPr lang="es-ES" sz="3000" b="1" noProof="0" dirty="0">
+                <a:solidFill>
+                  <a:srgbClr val="172554"/>
+                </a:solidFill>
+              </a:rPr>
+              <a:t>Patrones de Diseño en DDD</a:t>
+            </a:r>
+          </a:p>
+        </p:txBody>
+      </p:sp>
+      <p:sp>
+        <p:nvSpPr>
+          <p:cNvPr id="3" name="Rectángulo 2">
+            <a:extLst>
+              <a:ext uri="{FF2B5EF4-FFF2-40B4-BE49-F238E27FC236}">
+                <a16:creationId xmlns:a16="http://schemas.microsoft.com/office/drawing/2014/main" id="{8A377350-D139-2A87-75FC-C2CC8F0DFA80}"/>
+              </a:ext>
+            </a:extLst>
+          </p:cNvPr>
+          <p:cNvSpPr/>
+          <p:nvPr/>
+        </p:nvSpPr>
+        <p:spPr>
+          <a:xfrm flipV="1">
+            <a:off x="762000" y="970281"/>
+            <a:ext cx="4998720" cy="45719"/>
+          </a:xfrm>
+          <a:prstGeom prst="rect">
+            <a:avLst/>
+          </a:prstGeom>
+          <a:solidFill>
+            <a:srgbClr val="2563EB"/>
+          </a:solidFill>
+          <a:ln w="19050" cap="flat" cmpd="sng" algn="ctr">
+            <a:noFill/>
+            <a:prstDash val="solid"/>
+            <a:miter lim="800000"/>
+          </a:ln>
+          <a:effectLst/>
+          <a:extLst>
+            <a:ext uri="{91240B29-F687-4F45-9708-019B960494DF}">
+              <a14:hiddenLine xmlns:a14="http://schemas.microsoft.com/office/drawing/2010/main" w="19050" cap="flat" cmpd="sng" algn="ctr">
+                <a:solidFill>
+                  <a:schemeClr val="accent1">
+                    <a:shade val="15000"/>
+                  </a:schemeClr>
+                </a:solidFill>
+                <a:prstDash val="solid"/>
+                <a:miter lim="800000"/>
+              </a14:hiddenLine>
+            </a:ext>
+          </a:extLst>
+        </p:spPr>
+        <p:style>
+          <a:lnRef idx="2">
+            <a:schemeClr val="accent1">
+              <a:shade val="15000"/>
+            </a:schemeClr>
+          </a:lnRef>
+          <a:fillRef idx="1">
+            <a:schemeClr val="accent1"/>
+          </a:fillRef>
+          <a:effectRef idx="0">
+            <a:schemeClr val="accent1"/>
+          </a:effectRef>
+          <a:fontRef idx="minor">
+            <a:schemeClr val="lt1"/>
+          </a:fontRef>
+        </p:style>
+        <p:txBody>
+          <a:bodyPr rtlCol="0" anchor="ctr"/>
+          <a:lstStyle/>
+          <a:p>
+            <a:pPr algn="ctr"/>
+            <a:endParaRPr lang="es-ES" noProof="0" dirty="0"/>
+          </a:p>
+        </p:txBody>
+      </p:sp>
+      <p:sp>
+        <p:nvSpPr>
+          <p:cNvPr id="4" name="CuadroTexto 3">
+            <a:extLst>
+              <a:ext uri="{FF2B5EF4-FFF2-40B4-BE49-F238E27FC236}">
+                <a16:creationId xmlns:a16="http://schemas.microsoft.com/office/drawing/2014/main" id="{9BA5DF06-F56B-673C-FBB5-0CF8386CBB09}"/>
+              </a:ext>
+            </a:extLst>
+          </p:cNvPr>
+          <p:cNvSpPr txBox="1"/>
+          <p:nvPr/>
+        </p:nvSpPr>
+        <p:spPr>
+          <a:xfrm>
+            <a:off x="762000" y="1270000"/>
+            <a:ext cx="10668000" cy="381000"/>
+          </a:xfrm>
+          <a:prstGeom prst="rect">
+            <a:avLst/>
+          </a:prstGeom>
+          <a:noFill/>
+        </p:spPr>
+        <p:txBody>
+          <a:bodyPr vert="horz" wrap="square" rtlCol="0">
+            <a:noAutofit/>
+          </a:bodyPr>
+          <a:lstStyle/>
+          <a:p>
+            <a:r>
+              <a:rPr lang="es-ES" sz="2000" b="1" dirty="0">
+                <a:solidFill>
+                  <a:srgbClr val="7C3AED"/>
+                </a:solidFill>
+              </a:rPr>
+              <a:t>Specification</a:t>
+            </a:r>
+            <a:endParaRPr lang="es-ES" sz="2000" b="1" noProof="0" dirty="0">
+              <a:solidFill>
+                <a:srgbClr val="7C3AED"/>
+              </a:solidFill>
+            </a:endParaRPr>
+          </a:p>
+        </p:txBody>
+      </p:sp>
+      <p:sp>
+        <p:nvSpPr>
+          <p:cNvPr id="5" name="CuadroTexto 4">
+            <a:extLst>
+              <a:ext uri="{FF2B5EF4-FFF2-40B4-BE49-F238E27FC236}">
+                <a16:creationId xmlns:a16="http://schemas.microsoft.com/office/drawing/2014/main" id="{FB770F79-1B22-DC9E-BD1D-38969EF11ADB}"/>
+              </a:ext>
+            </a:extLst>
+          </p:cNvPr>
+          <p:cNvSpPr txBox="1"/>
+          <p:nvPr/>
+        </p:nvSpPr>
+        <p:spPr>
+          <a:xfrm>
+            <a:off x="762000" y="1687948"/>
+            <a:ext cx="10668000" cy="2016992"/>
+          </a:xfrm>
+          <a:prstGeom prst="rect">
+            <a:avLst/>
+          </a:prstGeom>
+          <a:noFill/>
+        </p:spPr>
+        <p:txBody>
+          <a:bodyPr vert="horz" wrap="square" rtlCol="0">
+            <a:noAutofit/>
+          </a:bodyPr>
+          <a:lstStyle/>
+          <a:p>
+            <a:pPr>
+              <a:spcAft>
+                <a:spcPts val="600"/>
+              </a:spcAft>
+            </a:pPr>
+            <a:r>
+              <a:rPr lang="es-ES" sz="1400" dirty="0">
+                <a:solidFill>
+                  <a:srgbClr val="374151"/>
+                </a:solidFill>
+              </a:rPr>
+              <a:t>El patrón Specification es una forma simple de encapsular reglas de negocio o filtros como objetos reutilizables, evitando que tu código se llene de métodos repetitivos en repositorios. Imagínalo como una "etiqueta" que dice "esta entidad cumple esta condición del dominio", y se puede combinar como piezas de Lego.</a:t>
+            </a:r>
+          </a:p>
+          <a:p>
+            <a:r>
+              <a:rPr lang="es-ES" sz="1400" dirty="0">
+                <a:solidFill>
+                  <a:srgbClr val="374151"/>
+                </a:solidFill>
+              </a:rPr>
+              <a:t>Es un patrón de diseño que representa una regla de negocio como un objeto independiente. En lugar de escribir filtros dispersos (como el Producto "está activo Y el precio es mayor de 100 euros"), creas clases que los definen y los pasas a repositorios o validaciones.</a:t>
+            </a:r>
+          </a:p>
+          <a:p>
+            <a:endParaRPr lang="es-ES" sz="1400" dirty="0">
+              <a:solidFill>
+                <a:srgbClr val="374151"/>
+              </a:solidFill>
+            </a:endParaRPr>
+          </a:p>
+          <a:p>
+            <a:pPr marL="742950" lvl="1" indent="-285750">
+              <a:buFont typeface="Arial" panose="020B0604020202020204" pitchFamily="34" charset="0"/>
+              <a:buChar char="•"/>
+            </a:pPr>
+            <a:r>
+              <a:rPr lang="es-ES" sz="1400" dirty="0">
+                <a:solidFill>
+                  <a:srgbClr val="374151"/>
+                </a:solidFill>
+              </a:rPr>
+              <a:t>Sirve para consultas, validaciones y reglas del dominio sin contaminar otras capas.</a:t>
+            </a:r>
+          </a:p>
+          <a:p>
+            <a:pPr marL="742950" lvl="1" indent="-285750">
+              <a:buFont typeface="Arial" panose="020B0604020202020204" pitchFamily="34" charset="0"/>
+              <a:buChar char="•"/>
+            </a:pPr>
+            <a:r>
+              <a:rPr lang="es-ES" sz="1400" dirty="0">
+                <a:solidFill>
+                  <a:srgbClr val="374151"/>
+                </a:solidFill>
+              </a:rPr>
+              <a:t>Usa expresiones LINQ para que funcione con EF Core sin SQL crudo.</a:t>
+            </a:r>
+          </a:p>
+        </p:txBody>
+      </p:sp>
+      <p:sp>
+        <p:nvSpPr>
+          <p:cNvPr id="8" name="CuadroTexto 7">
+            <a:extLst>
+              <a:ext uri="{FF2B5EF4-FFF2-40B4-BE49-F238E27FC236}">
+                <a16:creationId xmlns:a16="http://schemas.microsoft.com/office/drawing/2014/main" id="{3EF71D24-1D78-F4DC-485C-520982C0DD32}"/>
+              </a:ext>
+            </a:extLst>
+          </p:cNvPr>
+          <p:cNvSpPr txBox="1"/>
+          <p:nvPr/>
+        </p:nvSpPr>
+        <p:spPr>
+          <a:xfrm>
+            <a:off x="669637" y="3794993"/>
+            <a:ext cx="10668000" cy="381000"/>
+          </a:xfrm>
+          <a:prstGeom prst="rect">
+            <a:avLst/>
+          </a:prstGeom>
+          <a:noFill/>
+        </p:spPr>
+        <p:txBody>
+          <a:bodyPr vert="horz" wrap="square" rtlCol="0">
+            <a:noAutofit/>
+          </a:bodyPr>
+          <a:lstStyle/>
+          <a:p>
+            <a:r>
+              <a:rPr lang="es-ES" sz="2000" b="1" dirty="0">
+                <a:solidFill>
+                  <a:srgbClr val="7C3AED"/>
+                </a:solidFill>
+              </a:rPr>
+              <a:t>Uso en DDD</a:t>
+            </a:r>
+            <a:endParaRPr lang="es-ES" sz="2000" b="1" noProof="0" dirty="0">
+              <a:solidFill>
+                <a:srgbClr val="7C3AED"/>
+              </a:solidFill>
+            </a:endParaRPr>
+          </a:p>
+        </p:txBody>
+      </p:sp>
+      <p:sp>
+        <p:nvSpPr>
+          <p:cNvPr id="10" name="CuadroTexto 9">
+            <a:extLst>
+              <a:ext uri="{FF2B5EF4-FFF2-40B4-BE49-F238E27FC236}">
+                <a16:creationId xmlns:a16="http://schemas.microsoft.com/office/drawing/2014/main" id="{BC455420-C1D0-A09D-D342-7A3B454947A8}"/>
+              </a:ext>
+            </a:extLst>
+          </p:cNvPr>
+          <p:cNvSpPr txBox="1"/>
+          <p:nvPr/>
+        </p:nvSpPr>
+        <p:spPr>
+          <a:xfrm>
+            <a:off x="669637" y="4203701"/>
+            <a:ext cx="10668000" cy="2016992"/>
+          </a:xfrm>
+          <a:prstGeom prst="rect">
+            <a:avLst/>
+          </a:prstGeom>
+          <a:noFill/>
+        </p:spPr>
+        <p:txBody>
+          <a:bodyPr vert="horz" wrap="square" rtlCol="0">
+            <a:noAutofit/>
+          </a:bodyPr>
+          <a:lstStyle/>
+          <a:p>
+            <a:pPr>
+              <a:spcAft>
+                <a:spcPts val="1200"/>
+              </a:spcAft>
+            </a:pPr>
+            <a:r>
+              <a:rPr lang="es-ES" sz="1400" dirty="0">
+                <a:solidFill>
+                  <a:srgbClr val="374151"/>
+                </a:solidFill>
+              </a:rPr>
+              <a:t>En DDD, vive en la</a:t>
+            </a:r>
+            <a:r>
+              <a:rPr lang="es-ES" sz="1400" b="1" dirty="0">
+                <a:solidFill>
+                  <a:srgbClr val="374151"/>
+                </a:solidFill>
+              </a:rPr>
+              <a:t> capa de dominio</a:t>
+            </a:r>
+            <a:r>
+              <a:rPr lang="es-ES" sz="1400" dirty="0">
+                <a:solidFill>
+                  <a:srgbClr val="374151"/>
+                </a:solidFill>
+              </a:rPr>
+              <a:t> para mantener reglas de negocio puras y expresivas, lejos de la infraestructura (como EF).</a:t>
+            </a:r>
+          </a:p>
+          <a:p>
+            <a:pPr marL="742950" lvl="1" indent="-285750">
+              <a:buFont typeface="Arial" panose="020B0604020202020204" pitchFamily="34" charset="0"/>
+              <a:buChar char="•"/>
+            </a:pPr>
+            <a:r>
+              <a:rPr lang="es-ES" sz="1400" dirty="0">
+                <a:solidFill>
+                  <a:srgbClr val="374151"/>
+                </a:solidFill>
+              </a:rPr>
+              <a:t>Evita "explosión de métodos" en repositorios: en vez de </a:t>
+            </a:r>
+            <a:r>
+              <a:rPr lang="es-ES" sz="1400" dirty="0" err="1">
+                <a:solidFill>
+                  <a:srgbClr val="374151"/>
+                </a:solidFill>
+              </a:rPr>
+              <a:t>ObtenerConDescuento</a:t>
+            </a:r>
+            <a:r>
+              <a:rPr lang="es-ES" sz="1400" dirty="0">
+                <a:solidFill>
+                  <a:srgbClr val="374151"/>
+                </a:solidFill>
+              </a:rPr>
+              <a:t>(), </a:t>
+            </a:r>
+            <a:r>
+              <a:rPr lang="es-ES" sz="1400" dirty="0" err="1">
+                <a:solidFill>
+                  <a:srgbClr val="374151"/>
+                </a:solidFill>
+              </a:rPr>
+              <a:t>ObtenerActivos</a:t>
+            </a:r>
+            <a:r>
+              <a:rPr lang="es-ES" sz="1400" dirty="0">
+                <a:solidFill>
+                  <a:srgbClr val="374151"/>
+                </a:solidFill>
+              </a:rPr>
+              <a:t>(), </a:t>
+            </a:r>
+            <a:r>
+              <a:rPr lang="es-ES" sz="1400" dirty="0" err="1">
+                <a:solidFill>
+                  <a:srgbClr val="374151"/>
+                </a:solidFill>
+              </a:rPr>
+              <a:t>ObtenerBaratos</a:t>
+            </a:r>
+            <a:r>
+              <a:rPr lang="es-ES" sz="1400" dirty="0">
+                <a:solidFill>
+                  <a:srgbClr val="374151"/>
+                </a:solidFill>
+              </a:rPr>
+              <a:t>(), usas </a:t>
+            </a:r>
+            <a:r>
+              <a:rPr lang="es-ES" sz="1400" dirty="0" err="1">
+                <a:solidFill>
+                  <a:srgbClr val="374151"/>
+                </a:solidFill>
+              </a:rPr>
+              <a:t>repo.Get</a:t>
+            </a:r>
+            <a:r>
+              <a:rPr lang="es-ES" sz="1400" dirty="0">
+                <a:solidFill>
+                  <a:srgbClr val="374151"/>
+                </a:solidFill>
+              </a:rPr>
+              <a:t>(</a:t>
+            </a:r>
+            <a:r>
+              <a:rPr lang="es-ES" sz="1400" dirty="0" err="1">
+                <a:solidFill>
+                  <a:srgbClr val="374151"/>
+                </a:solidFill>
+              </a:rPr>
+              <a:t>specification</a:t>
+            </a:r>
+            <a:r>
+              <a:rPr lang="es-ES" sz="1400" dirty="0">
+                <a:solidFill>
+                  <a:srgbClr val="374151"/>
+                </a:solidFill>
+              </a:rPr>
+              <a:t>).</a:t>
+            </a:r>
+          </a:p>
+          <a:p>
+            <a:pPr marL="742950" lvl="1" indent="-285750">
+              <a:buFont typeface="Arial" panose="020B0604020202020204" pitchFamily="34" charset="0"/>
+              <a:buChar char="•"/>
+            </a:pPr>
+            <a:r>
+              <a:rPr lang="es-ES" sz="1400" dirty="0">
+                <a:solidFill>
+                  <a:srgbClr val="374151"/>
+                </a:solidFill>
+              </a:rPr>
+              <a:t>Se combina con operadores AND/OR/NOT para reglas complejas del </a:t>
+            </a:r>
+            <a:r>
+              <a:rPr lang="es-ES" sz="1400" dirty="0" err="1">
+                <a:solidFill>
+                  <a:srgbClr val="374151"/>
+                </a:solidFill>
+              </a:rPr>
+              <a:t>ubiquitous</a:t>
+            </a:r>
+            <a:r>
+              <a:rPr lang="es-ES" sz="1400" dirty="0">
+                <a:solidFill>
+                  <a:srgbClr val="374151"/>
+                </a:solidFill>
+              </a:rPr>
+              <a:t> </a:t>
+            </a:r>
+            <a:r>
+              <a:rPr lang="es-ES" sz="1400" dirty="0" err="1">
+                <a:solidFill>
+                  <a:srgbClr val="374151"/>
+                </a:solidFill>
+              </a:rPr>
+              <a:t>language</a:t>
+            </a:r>
+            <a:r>
+              <a:rPr lang="es-ES" sz="1400" dirty="0">
+                <a:solidFill>
+                  <a:srgbClr val="374151"/>
+                </a:solidFill>
+              </a:rPr>
+              <a:t>.</a:t>
+            </a:r>
+          </a:p>
+          <a:p>
+            <a:pPr marL="742950" lvl="1" indent="-285750">
+              <a:buFont typeface="Arial" panose="020B0604020202020204" pitchFamily="34" charset="0"/>
+              <a:buChar char="•"/>
+            </a:pPr>
+            <a:r>
+              <a:rPr lang="es-ES" sz="1400" dirty="0">
+                <a:solidFill>
+                  <a:srgbClr val="374151"/>
+                </a:solidFill>
+              </a:rPr>
+              <a:t>El repositorio genérico la traduce a </a:t>
+            </a:r>
+            <a:r>
+              <a:rPr lang="es-ES" sz="1400" dirty="0" err="1">
+                <a:solidFill>
+                  <a:srgbClr val="374151"/>
+                </a:solidFill>
+              </a:rPr>
+              <a:t>IQueryable</a:t>
+            </a:r>
+            <a:r>
+              <a:rPr lang="es-ES" sz="1400" dirty="0">
+                <a:solidFill>
+                  <a:srgbClr val="374151"/>
+                </a:solidFill>
+              </a:rPr>
+              <a:t> para EF, manteniendo el dominio agnóstico de la BD.</a:t>
+            </a:r>
+          </a:p>
+          <a:p>
+            <a:pPr marL="742950" lvl="1" indent="-285750">
+              <a:buFont typeface="Arial" panose="020B0604020202020204" pitchFamily="34" charset="0"/>
+              <a:buChar char="•"/>
+            </a:pPr>
+            <a:endParaRPr lang="es-ES" sz="1400" dirty="0">
+              <a:solidFill>
+                <a:srgbClr val="374151"/>
+              </a:solidFill>
+            </a:endParaRPr>
+          </a:p>
+        </p:txBody>
+      </p:sp>
+    </p:spTree>
+    <p:extLst>
+      <p:ext uri="{BB962C8B-B14F-4D97-AF65-F5344CB8AC3E}">
+        <p14:creationId xmlns:p14="http://schemas.microsoft.com/office/powerpoint/2010/main" val="2190211258"/>
+      </p:ext>
+    </p:extLst>
+  </p:cSld>
+  <p:clrMapOvr>
+    <a:masterClrMapping/>
+  </p:clrMapOvr>
+</p:sld>
+</file>
+
+<file path=ppt/slides/slide15.xml><?xml version="1.0" encoding="utf-8"?>
 <p:sld xmlns:a="http://schemas.openxmlformats.org/drawingml/2006/main" xmlns:r="http://schemas.openxmlformats.org/officeDocument/2006/relationships" xmlns:p="http://schemas.openxmlformats.org/presentationml/2006/main">
   <p:cSld>
     <p:bg>
@@ -6073,21 +8684,8 @@
                   <a:srgbClr val="FFFFFF"/>
                 </a:solidFill>
               </a:rPr>
-              <a:t>Query </a:t>
-            </a:r>
-            <a:r>
-              <a:rPr lang="es-ES" sz="1500" b="1" noProof="0" dirty="0" err="1">
-                <a:solidFill>
-                  <a:srgbClr val="FFFFFF"/>
-                </a:solidFill>
-              </a:rPr>
-              <a:t>Object</a:t>
-            </a:r>
-            <a:endParaRPr lang="es-ES" sz="1500" b="1" noProof="0" dirty="0">
-              <a:solidFill>
-                <a:srgbClr val="FFFFFF"/>
-              </a:solidFill>
-            </a:endParaRPr>
+              <a:t>Query Object</a:t>
+            </a:r>
           </a:p>
           <a:p>
             <a:pPr algn="ctr"/>
@@ -6115,7 +8713,7 @@
 </p:sld>
 </file>
 
-<file path=ppt/slides/slide13.xml><?xml version="1.0" encoding="utf-8"?>
+<file path=ppt/slides/slide16.xml><?xml version="1.0" encoding="utf-8"?>
 <p:sld xmlns:a="http://schemas.openxmlformats.org/drawingml/2006/main" xmlns:r="http://schemas.openxmlformats.org/officeDocument/2006/relationships" xmlns:p="http://schemas.openxmlformats.org/presentationml/2006/main">
   <p:cSld>
     <p:bg>
@@ -7319,8 +9917,8 @@
         </p:nvSpPr>
         <p:spPr>
           <a:xfrm>
-            <a:off x="1344168" y="1270000"/>
-            <a:ext cx="7562088" cy="369332"/>
+            <a:off x="762000" y="1327387"/>
+            <a:ext cx="10404764" cy="1178100"/>
           </a:xfrm>
           <a:prstGeom prst="rect">
             <a:avLst/>
@@ -7334,12 +9932,84 @@
           <a:lstStyle/>
           <a:p>
             <a:r>
-              <a:rPr lang="es-ES" sz="1600" noProof="0" dirty="0">
-                <a:solidFill>
-                  <a:srgbClr val="374151"/>
-                </a:solidFill>
-              </a:rPr>
-              <a:t>Lenguaje compartido, consistente y unificado que utilizan tanto los desarrolladores como los expertos en el dominio de negocio.</a:t>
+              <a:rPr lang="es-ES" sz="1600" dirty="0">
+                <a:solidFill>
+                  <a:srgbClr val="374151"/>
+                </a:solidFill>
+              </a:rPr>
+              <a:t>              </a:t>
+            </a:r>
+            <a:r>
+              <a:rPr lang="es-ES" sz="1400" dirty="0">
+                <a:solidFill>
+                  <a:srgbClr val="374151"/>
+                </a:solidFill>
+              </a:rPr>
+              <a:t>En Domain-</a:t>
+            </a:r>
+            <a:r>
+              <a:rPr lang="es-ES" sz="1400" dirty="0" err="1">
+                <a:solidFill>
+                  <a:srgbClr val="374151"/>
+                </a:solidFill>
+              </a:rPr>
+              <a:t>Driven</a:t>
+            </a:r>
+            <a:r>
+              <a:rPr lang="es-ES" sz="1400" dirty="0">
+                <a:solidFill>
+                  <a:srgbClr val="374151"/>
+                </a:solidFill>
+              </a:rPr>
+              <a:t> </a:t>
+            </a:r>
+            <a:r>
+              <a:rPr lang="es-ES" sz="1400" dirty="0" err="1">
+                <a:solidFill>
+                  <a:srgbClr val="374151"/>
+                </a:solidFill>
+              </a:rPr>
+              <a:t>Design</a:t>
+            </a:r>
+            <a:r>
+              <a:rPr lang="es-ES" sz="1400" dirty="0">
+                <a:solidFill>
+                  <a:srgbClr val="374151"/>
+                </a:solidFill>
+              </a:rPr>
+              <a:t> (DDD), "ubicuo" (del inglés </a:t>
+            </a:r>
+            <a:r>
+              <a:rPr lang="es-ES" sz="1400" dirty="0" err="1">
+                <a:solidFill>
+                  <a:srgbClr val="374151"/>
+                </a:solidFill>
+              </a:rPr>
+              <a:t>Ubiquitous</a:t>
+            </a:r>
+            <a:r>
+              <a:rPr lang="es-ES" sz="1400" dirty="0">
+                <a:solidFill>
+                  <a:srgbClr val="374151"/>
+                </a:solidFill>
+              </a:rPr>
+              <a:t> </a:t>
+            </a:r>
+            <a:r>
+              <a:rPr lang="es-ES" sz="1400" dirty="0" err="1">
+                <a:solidFill>
+                  <a:srgbClr val="374151"/>
+                </a:solidFill>
+              </a:rPr>
+              <a:t>Language</a:t>
+            </a:r>
+            <a:r>
+              <a:rPr lang="es-ES" sz="1400" dirty="0">
+                <a:solidFill>
+                  <a:srgbClr val="374151"/>
+                </a:solidFill>
+              </a:rPr>
+              <a:t> o Lenguaje Ubicuo) se refiere a un lenguaje compartido, consistente y unificado que utilizan tanto los desarrolladores como los expertos en el dominio de negocio. Está presente en todas partes: código, documentación, discusiones y diseño, eliminando la ambigüedad.</a:t>
             </a:r>
           </a:p>
         </p:txBody>
@@ -7358,8 +10028,8 @@
         </p:nvSpPr>
         <p:spPr>
           <a:xfrm>
-            <a:off x="762000" y="2286000"/>
-            <a:ext cx="10668000" cy="369332"/>
+            <a:off x="762000" y="2232902"/>
+            <a:ext cx="10668000" cy="4017473"/>
           </a:xfrm>
           <a:prstGeom prst="rect">
             <a:avLst/>
@@ -7372,6 +10042,22 @@
           </a:bodyPr>
           <a:lstStyle/>
           <a:p>
+            <a:pPr>
+              <a:spcAft>
+                <a:spcPts val="600"/>
+              </a:spcAft>
+            </a:pPr>
+            <a:r>
+              <a:rPr lang="es-ES" b="1" dirty="0"/>
+              <a:t>Características y Beneficios Clave:</a:t>
+            </a:r>
+            <a:endParaRPr lang="es-ES" sz="1500" noProof="0" dirty="0">
+              <a:solidFill>
+                <a:srgbClr val="374151"/>
+              </a:solidFill>
+            </a:endParaRPr>
+          </a:p>
+          <a:p>
             <a:pPr indent="-285750">
               <a:spcAft>
                 <a:spcPts val="600"/>
@@ -7384,7 +10070,30 @@
                   <a:srgbClr val="374151"/>
                 </a:solidFill>
               </a:rPr>
-              <a:t>Comunicación Común: Todos los involucrados usan la misma terminología</a:t>
+              <a:t>Comunicación Común: </a:t>
+            </a:r>
+            <a:br>
+              <a:rPr lang="es-ES" sz="1500" noProof="0" dirty="0">
+                <a:solidFill>
+                  <a:srgbClr val="374151"/>
+                </a:solidFill>
+              </a:rPr>
+            </a:br>
+            <a:r>
+              <a:rPr lang="es-ES" sz="1500" noProof="0" dirty="0">
+                <a:solidFill>
+                  <a:srgbClr val="374151"/>
+                </a:solidFill>
+              </a:rPr>
+              <a:t>	</a:t>
+            </a:r>
+            <a:r>
+              <a:rPr lang="es-ES" sz="1500" dirty="0">
+                <a:solidFill>
+                  <a:srgbClr val="374151"/>
+                </a:solidFill>
+              </a:rPr>
+              <a:t>Todos los involucrados (técnicos y no técnicos) usan la misma terminología, evitando traducciones erróneas entre el 	negocio y el código.</a:t>
             </a:r>
           </a:p>
           <a:p>
@@ -7400,7 +10109,30 @@
                   <a:srgbClr val="374151"/>
                 </a:solidFill>
               </a:rPr>
-              <a:t>Basado en el Modelo: Se basa en el modelo de dominio creado por el equipo</a:t>
+              <a:t>Basado en el Modelo: </a:t>
+            </a:r>
+            <a:br>
+              <a:rPr lang="es-ES" sz="1500" noProof="0" dirty="0">
+                <a:solidFill>
+                  <a:srgbClr val="374151"/>
+                </a:solidFill>
+              </a:rPr>
+            </a:br>
+            <a:r>
+              <a:rPr lang="es-ES" sz="1500" noProof="0" dirty="0">
+                <a:solidFill>
+                  <a:srgbClr val="374151"/>
+                </a:solidFill>
+              </a:rPr>
+              <a:t>	</a:t>
+            </a:r>
+            <a:r>
+              <a:rPr lang="es-ES" sz="1500" dirty="0">
+                <a:solidFill>
+                  <a:srgbClr val="374151"/>
+                </a:solidFill>
+              </a:rPr>
+              <a:t>Este lenguaje se basa en el modelo de dominio que el equipo ha creado, asegurando que las ideas complejas de 	negocio se reflejen fielmente en el software.</a:t>
             </a:r>
           </a:p>
           <a:p>
@@ -7416,7 +10148,50 @@
                   <a:srgbClr val="374151"/>
                 </a:solidFill>
               </a:rPr>
-              <a:t>Ubicuidad en el Diseño: Se refleja en clases, métodos, variables y test</a:t>
+              <a:t>Ubicuidad en el Diseño: </a:t>
+            </a:r>
+            <a:br>
+              <a:rPr lang="es-ES" sz="1500" noProof="0" dirty="0">
+                <a:solidFill>
+                  <a:srgbClr val="374151"/>
+                </a:solidFill>
+              </a:rPr>
+            </a:br>
+            <a:r>
+              <a:rPr lang="es-ES" sz="1500" noProof="0" dirty="0">
+                <a:solidFill>
+                  <a:srgbClr val="374151"/>
+                </a:solidFill>
+              </a:rPr>
+              <a:t>	</a:t>
+            </a:r>
+            <a:r>
+              <a:rPr lang="es-ES" sz="1500" dirty="0">
+                <a:solidFill>
+                  <a:srgbClr val="374151"/>
+                </a:solidFill>
+              </a:rPr>
+              <a:t>Las palabras y frases del lenguaje ubicuo se encuentran reflejadas explícitamente en el nombre de las clases, 	métodos, variables y </a:t>
+            </a:r>
+            <a:r>
+              <a:rPr lang="es-ES" sz="1500" dirty="0" err="1">
+                <a:solidFill>
+                  <a:srgbClr val="374151"/>
+                </a:solidFill>
+              </a:rPr>
+              <a:t>tests</a:t>
+            </a:r>
+            <a:r>
+              <a:rPr lang="es-ES" sz="1500" dirty="0">
+                <a:solidFill>
+                  <a:srgbClr val="374151"/>
+                </a:solidFill>
+              </a:rPr>
+              <a:t> del código fuente, lo que hace que el código sea comprensible para los expertos de	negocio</a:t>
+            </a:r>
+            <a:r>
+              <a:rPr lang="es-ES" dirty="0"/>
+              <a:t>.</a:t>
             </a:r>
           </a:p>
           <a:p>
@@ -7432,7 +10207,30 @@
                   <a:srgbClr val="374151"/>
                 </a:solidFill>
               </a:rPr>
-              <a:t>Cohesión de Equipo: Reduce la brecha entre negocio y software</a:t>
+              <a:t>Cohesión de Equipo: </a:t>
+            </a:r>
+            <a:br>
+              <a:rPr lang="es-ES" sz="1500" noProof="0" dirty="0">
+                <a:solidFill>
+                  <a:srgbClr val="374151"/>
+                </a:solidFill>
+              </a:rPr>
+            </a:br>
+            <a:r>
+              <a:rPr lang="es-ES" sz="1500" noProof="0" dirty="0">
+                <a:solidFill>
+                  <a:srgbClr val="374151"/>
+                </a:solidFill>
+              </a:rPr>
+              <a:t>	</a:t>
+            </a:r>
+            <a:r>
+              <a:rPr lang="es-ES" sz="1500" dirty="0">
+                <a:solidFill>
+                  <a:srgbClr val="374151"/>
+                </a:solidFill>
+              </a:rPr>
+              <a:t>Facilita el trabajo en equipo, reduce la brecha entre el problema (negocio) y la solución (software), y asegura que la 	evolución del sistema sea consistente con el modelo de negocio. </a:t>
             </a:r>
           </a:p>
         </p:txBody>
@@ -7452,15 +10250,15 @@
           <p:nvPr/>
         </p:nvPicPr>
         <p:blipFill>
-          <a:blip r:embed="rId2"/>
+          <a:blip r:embed="rId3"/>
           <a:stretch>
             <a:fillRect/>
           </a:stretch>
         </p:blipFill>
         <p:spPr>
           <a:xfrm>
-            <a:off x="841248" y="1270000"/>
-            <a:ext cx="502920" cy="502920"/>
+            <a:off x="895927" y="1230974"/>
+            <a:ext cx="424873" cy="424873"/>
           </a:xfrm>
           <a:prstGeom prst="rect">
             <a:avLst/>
@@ -10485,23 +13283,7 @@
                   <a:srgbClr val="374151"/>
                 </a:solidFill>
               </a:rPr>
-              <a:t> </a:t>
-            </a:r>
-            <a:r>
-              <a:rPr lang="es-ES" sz="1300" noProof="0" dirty="0" err="1">
-                <a:solidFill>
-                  <a:srgbClr val="374151"/>
-                </a:solidFill>
-              </a:rPr>
-              <a:t>Object</a:t>
-            </a:r>
-            <a:r>
-              <a:rPr lang="es-ES" sz="1300" noProof="0" dirty="0">
-                <a:solidFill>
-                  <a:srgbClr val="374151"/>
-                </a:solidFill>
-              </a:rPr>
-              <a:t> no tiene Id ni tabla independiente</a:t>
+              <a:t> Object no tiene Id ni tabla independiente</a:t>
             </a:r>
           </a:p>
         </p:txBody>
@@ -10776,29 +13558,7 @@
                 <a:ea typeface="Consolas" pitchFamily="34" charset="-122"/>
                 <a:cs typeface="Consolas" pitchFamily="34" charset="-120"/>
               </a:rPr>
-              <a:t> </a:t>
-            </a:r>
-            <a:r>
-              <a:rPr lang="es-ES" sz="1050" i="1" noProof="0" dirty="0" err="1">
-                <a:solidFill>
-                  <a:srgbClr val="94A3B8"/>
-                </a:solidFill>
-                <a:latin typeface="Consolas" pitchFamily="34" charset="0"/>
-                <a:ea typeface="Consolas" pitchFamily="34" charset="-122"/>
-                <a:cs typeface="Consolas" pitchFamily="34" charset="-120"/>
-              </a:rPr>
-              <a:t>Object</a:t>
-            </a:r>
-            <a:r>
-              <a:rPr lang="es-ES" sz="1050" i="1" noProof="0" dirty="0">
-                <a:solidFill>
-                  <a:srgbClr val="94A3B8"/>
-                </a:solidFill>
-                <a:latin typeface="Consolas" pitchFamily="34" charset="0"/>
-                <a:ea typeface="Consolas" pitchFamily="34" charset="-122"/>
-                <a:cs typeface="Consolas" pitchFamily="34" charset="-120"/>
-              </a:rPr>
-              <a:t>: Email</a:t>
+              <a:t> Object: Email</a:t>
             </a:r>
             <a:endParaRPr lang="es-ES" sz="1050" noProof="0" dirty="0"/>
           </a:p>
@@ -11072,29 +13832,7 @@
                 <a:ea typeface="Consolas" pitchFamily="34" charset="-122"/>
                 <a:cs typeface="Consolas" pitchFamily="34" charset="-120"/>
               </a:rPr>
-              <a:t> </a:t>
-            </a:r>
-            <a:r>
-              <a:rPr lang="es-ES" sz="1050" i="1" noProof="0" dirty="0" err="1">
-                <a:solidFill>
-                  <a:srgbClr val="94A3B8"/>
-                </a:solidFill>
-                <a:latin typeface="Consolas" pitchFamily="34" charset="0"/>
-                <a:ea typeface="Consolas" pitchFamily="34" charset="-122"/>
-                <a:cs typeface="Consolas" pitchFamily="34" charset="-120"/>
-              </a:rPr>
-              <a:t>Object</a:t>
-            </a:r>
-            <a:r>
-              <a:rPr lang="es-ES" sz="1050" i="1" noProof="0" dirty="0">
-                <a:solidFill>
-                  <a:srgbClr val="94A3B8"/>
-                </a:solidFill>
-                <a:latin typeface="Consolas" pitchFamily="34" charset="0"/>
-                <a:ea typeface="Consolas" pitchFamily="34" charset="-122"/>
-                <a:cs typeface="Consolas" pitchFamily="34" charset="-120"/>
-              </a:rPr>
-              <a:t>: </a:t>
+              <a:t> Object: </a:t>
             </a:r>
             <a:r>
               <a:rPr lang="es-ES" sz="1050" i="1" noProof="0" dirty="0" err="1">
@@ -11549,8 +14287,8 @@
         </p:nvSpPr>
         <p:spPr>
           <a:xfrm>
-            <a:off x="762000" y="1270000"/>
-            <a:ext cx="10668000" cy="369332"/>
+            <a:off x="762000" y="1269999"/>
+            <a:ext cx="10668000" cy="4687456"/>
           </a:xfrm>
           <a:prstGeom prst="rect">
             <a:avLst/>
@@ -11563,256 +14301,224 @@
           </a:bodyPr>
           <a:lstStyle/>
           <a:p>
+            <a:pPr>
+              <a:spcAft>
+                <a:spcPts val="1200"/>
+              </a:spcAft>
+            </a:pPr>
+            <a:r>
+              <a:rPr lang="es-ES" sz="1600" dirty="0">
+                <a:solidFill>
+                  <a:srgbClr val="374151"/>
+                </a:solidFill>
+              </a:rPr>
+              <a:t>Un agregado es un </a:t>
+            </a:r>
+            <a:r>
+              <a:rPr lang="es-ES" sz="1600" dirty="0" err="1">
+                <a:solidFill>
+                  <a:srgbClr val="374151"/>
+                </a:solidFill>
+              </a:rPr>
+              <a:t>cluster</a:t>
+            </a:r>
+            <a:r>
+              <a:rPr lang="es-ES" sz="1600" dirty="0">
+                <a:solidFill>
+                  <a:srgbClr val="374151"/>
+                </a:solidFill>
+              </a:rPr>
+              <a:t> de entidades y </a:t>
+            </a:r>
+            <a:r>
+              <a:rPr lang="es-ES" sz="1600" dirty="0" err="1">
+                <a:solidFill>
+                  <a:srgbClr val="374151"/>
+                </a:solidFill>
+              </a:rPr>
+              <a:t>value</a:t>
+            </a:r>
+            <a:r>
+              <a:rPr lang="es-ES" sz="1600" dirty="0">
+                <a:solidFill>
+                  <a:srgbClr val="374151"/>
+                </a:solidFill>
+              </a:rPr>
+              <a:t> </a:t>
+            </a:r>
+            <a:r>
+              <a:rPr lang="es-ES" sz="1600" dirty="0" err="1">
+                <a:solidFill>
+                  <a:srgbClr val="374151"/>
+                </a:solidFill>
+              </a:rPr>
+              <a:t>objects</a:t>
+            </a:r>
+            <a:r>
+              <a:rPr lang="es-ES" sz="1600" dirty="0">
+                <a:solidFill>
+                  <a:srgbClr val="374151"/>
+                </a:solidFill>
+              </a:rPr>
+              <a:t> tratado como una unidad atómica para consistencia, con una raíz de agregado que controla el acceso y las invariantes</a:t>
+            </a:r>
             <a:r>
               <a:rPr lang="es-ES" sz="1600" noProof="0" dirty="0">
                 <a:solidFill>
                   <a:srgbClr val="374151"/>
                 </a:solidFill>
               </a:rPr>
-              <a:t>Grupo de entidades y </a:t>
-            </a:r>
-            <a:r>
-              <a:rPr lang="es-ES" sz="1600" noProof="0" dirty="0" err="1">
-                <a:solidFill>
-                  <a:srgbClr val="374151"/>
-                </a:solidFill>
-              </a:rPr>
-              <a:t>value</a:t>
-            </a:r>
-            <a:r>
-              <a:rPr lang="es-ES" sz="1600" noProof="0" dirty="0">
-                <a:solidFill>
-                  <a:srgbClr val="374151"/>
-                </a:solidFill>
-              </a:rPr>
-              <a:t> </a:t>
-            </a:r>
-            <a:r>
-              <a:rPr lang="es-ES" sz="1600" noProof="0" dirty="0" err="1">
-                <a:solidFill>
-                  <a:srgbClr val="374151"/>
-                </a:solidFill>
-              </a:rPr>
-              <a:t>objects</a:t>
-            </a:r>
-            <a:r>
-              <a:rPr lang="es-ES" sz="1600" noProof="0" dirty="0">
-                <a:solidFill>
-                  <a:srgbClr val="374151"/>
-                </a:solidFill>
-              </a:rPr>
-              <a:t> que deben mantenerse coherentes como una sola unidad, con una raíz de agregado que controla el acceso y las invariantes.</a:t>
-            </a:r>
-          </a:p>
-        </p:txBody>
-      </p:sp>
-      <p:sp>
-        <p:nvSpPr>
-          <p:cNvPr id="5" name="CuadroTexto 4">
-            <a:extLst>
-              <a:ext uri="{FF2B5EF4-FFF2-40B4-BE49-F238E27FC236}">
-                <a16:creationId xmlns:a16="http://schemas.microsoft.com/office/drawing/2014/main" id="{8F87931E-15CF-DDDF-A3BB-120CA1162CA8}"/>
-              </a:ext>
-            </a:extLst>
-          </p:cNvPr>
-          <p:cNvSpPr txBox="1"/>
-          <p:nvPr/>
-        </p:nvSpPr>
-        <p:spPr>
-          <a:xfrm>
-            <a:off x="762000" y="2222500"/>
-            <a:ext cx="10668000" cy="381000"/>
-          </a:xfrm>
-          <a:prstGeom prst="rect">
-            <a:avLst/>
-          </a:prstGeom>
-          <a:noFill/>
-        </p:spPr>
-        <p:txBody>
-          <a:bodyPr vert="horz" wrap="square" rtlCol="0">
-            <a:noAutofit/>
-          </a:bodyPr>
-          <a:lstStyle/>
-          <a:p>
-            <a:r>
-              <a:rPr lang="es-ES" b="1" noProof="0" dirty="0">
-                <a:solidFill>
-                  <a:srgbClr val="172554"/>
-                </a:solidFill>
-              </a:rPr>
-              <a:t>La Raíz del Agregado:</a:t>
-            </a:r>
-          </a:p>
-        </p:txBody>
-      </p:sp>
-      <p:sp>
-        <p:nvSpPr>
-          <p:cNvPr id="6" name="CuadroTexto 5">
-            <a:extLst>
-              <a:ext uri="{FF2B5EF4-FFF2-40B4-BE49-F238E27FC236}">
-                <a16:creationId xmlns:a16="http://schemas.microsoft.com/office/drawing/2014/main" id="{17F147AD-5310-1277-8D2A-1FDDA5FDDB1B}"/>
-              </a:ext>
-            </a:extLst>
-          </p:cNvPr>
-          <p:cNvSpPr txBox="1"/>
-          <p:nvPr/>
-        </p:nvSpPr>
-        <p:spPr>
-          <a:xfrm>
-            <a:off x="762000" y="2667000"/>
-            <a:ext cx="10668000" cy="369332"/>
-          </a:xfrm>
-          <a:prstGeom prst="rect">
-            <a:avLst/>
-          </a:prstGeom>
-          <a:noFill/>
-        </p:spPr>
-        <p:txBody>
-          <a:bodyPr vert="horz" wrap="square" rtlCol="0">
-            <a:noAutofit/>
-          </a:bodyPr>
-          <a:lstStyle/>
-          <a:p>
-            <a:pPr indent="-285750">
+              <a:t>.</a:t>
+            </a:r>
+          </a:p>
+          <a:p>
+            <a:pPr>
               <a:spcAft>
                 <a:spcPts val="600"/>
               </a:spcAft>
-              <a:buChar char="•"/>
             </a:pPr>
             <a:r>
-              <a:rPr lang="es-ES" sz="1500" noProof="0" dirty="0">
-                <a:solidFill>
-                  <a:srgbClr val="374151"/>
-                </a:solidFill>
-              </a:rPr>
-              <a:t>Es el único objeto que otros objetos externos pueden referenciar directamente</a:t>
-            </a:r>
-          </a:p>
-          <a:p>
-            <a:pPr indent="-285750">
+              <a:rPr lang="es-ES" sz="1600" dirty="0">
+                <a:solidFill>
+                  <a:srgbClr val="374151"/>
+                </a:solidFill>
+              </a:rPr>
+              <a:t>Un agregado es un grupo de objetos del dominio que deben mantenerse coherentes como una sola unidad. Piensa en él como una “caja” que encapsula varias piezas y solo deja entrar y salir cambios por un punto controlado: la raíz del agregado.</a:t>
+            </a:r>
+          </a:p>
+          <a:p>
+            <a:pPr>
               <a:spcAft>
                 <a:spcPts val="600"/>
               </a:spcAft>
-              <a:buChar char="•"/>
             </a:pPr>
-            <a:r>
-              <a:rPr lang="es-ES" sz="1500" noProof="0" dirty="0">
-                <a:solidFill>
-                  <a:srgbClr val="374151"/>
-                </a:solidFill>
-              </a:rPr>
-              <a:t>Controla la creación y modificación de los objetos internos</a:t>
-            </a:r>
-          </a:p>
-          <a:p>
-            <a:pPr indent="-285750">
-              <a:spcAft>
-                <a:spcPts val="600"/>
-              </a:spcAft>
-              <a:buChar char="•"/>
-            </a:pPr>
-            <a:r>
-              <a:rPr lang="es-ES" sz="1500" noProof="0" dirty="0">
-                <a:solidFill>
-                  <a:srgbClr val="374151"/>
-                </a:solidFill>
-              </a:rPr>
-              <a:t>Garantiza que el estado del conjunto siga siendo válido</a:t>
-            </a:r>
-          </a:p>
-          <a:p>
-            <a:pPr indent="-285750">
-              <a:spcAft>
-                <a:spcPts val="600"/>
-              </a:spcAft>
-              <a:buChar char="•"/>
-            </a:pPr>
-            <a:r>
-              <a:rPr lang="es-ES" sz="1500" noProof="0" dirty="0">
-                <a:solidFill>
-                  <a:srgbClr val="374151"/>
-                </a:solidFill>
-              </a:rPr>
-              <a:t>Sirve como frontera transaccional: se guarda y carga como unidad</a:t>
-            </a:r>
-          </a:p>
-        </p:txBody>
-      </p:sp>
-      <p:sp>
-        <p:nvSpPr>
-          <p:cNvPr id="7" name="CuadroTexto 6">
-            <a:extLst>
-              <a:ext uri="{FF2B5EF4-FFF2-40B4-BE49-F238E27FC236}">
-                <a16:creationId xmlns:a16="http://schemas.microsoft.com/office/drawing/2014/main" id="{E254857A-67C9-215C-57EF-D757D68063B8}"/>
-              </a:ext>
-            </a:extLst>
-          </p:cNvPr>
-          <p:cNvSpPr txBox="1"/>
-          <p:nvPr/>
-        </p:nvSpPr>
-        <p:spPr>
-          <a:xfrm>
-            <a:off x="762000" y="4762500"/>
-            <a:ext cx="10668000" cy="381000"/>
-          </a:xfrm>
-          <a:prstGeom prst="rect">
-            <a:avLst/>
-          </a:prstGeom>
-          <a:noFill/>
-        </p:spPr>
-        <p:txBody>
-          <a:bodyPr vert="horz" wrap="square" rtlCol="0">
-            <a:noAutofit/>
-          </a:bodyPr>
-          <a:lstStyle/>
-          <a:p>
-            <a:r>
-              <a:rPr lang="es-ES" sz="1600" b="1" noProof="0" dirty="0">
-                <a:solidFill>
-                  <a:srgbClr val="172554"/>
-                </a:solidFill>
-              </a:rPr>
-              <a:t>Ejemplo:</a:t>
-            </a:r>
-          </a:p>
-        </p:txBody>
-      </p:sp>
-      <p:sp>
-        <p:nvSpPr>
-          <p:cNvPr id="8" name="CuadroTexto 7">
-            <a:extLst>
-              <a:ext uri="{FF2B5EF4-FFF2-40B4-BE49-F238E27FC236}">
-                <a16:creationId xmlns:a16="http://schemas.microsoft.com/office/drawing/2014/main" id="{10CCE3C5-9EED-9DBC-8372-CC06CE78F8ED}"/>
-              </a:ext>
-            </a:extLst>
-          </p:cNvPr>
-          <p:cNvSpPr txBox="1"/>
-          <p:nvPr/>
-        </p:nvSpPr>
-        <p:spPr>
-          <a:xfrm>
-            <a:off x="762000" y="5207000"/>
-            <a:ext cx="10668000" cy="369332"/>
-          </a:xfrm>
-          <a:prstGeom prst="rect">
-            <a:avLst/>
-          </a:prstGeom>
-          <a:noFill/>
-        </p:spPr>
-        <p:txBody>
-          <a:bodyPr vert="horz" wrap="square" rtlCol="0">
-            <a:noAutofit/>
-          </a:bodyPr>
-          <a:lstStyle/>
-          <a:p>
-            <a:r>
-              <a:rPr lang="es-ES" sz="1400" noProof="0" dirty="0">
-                <a:solidFill>
-                  <a:srgbClr val="6B7280"/>
-                </a:solidFill>
-              </a:rPr>
-              <a:t>Un Pedido con líneas, dirección de envío y descuentos. Desde fuera se usan métodos como AgregarLinea o CambiarDireccion.</a:t>
-            </a:r>
+            <a:endParaRPr lang="es-ES" sz="1600" dirty="0">
+              <a:solidFill>
+                <a:srgbClr val="374151"/>
+              </a:solidFill>
+            </a:endParaRPr>
+          </a:p>
+          <a:p>
+            <a:r>
+              <a:rPr lang="es-ES" sz="1600" b="1" dirty="0">
+                <a:solidFill>
+                  <a:srgbClr val="374151"/>
+                </a:solidFill>
+              </a:rPr>
+              <a:t>Idea principal</a:t>
+            </a:r>
+          </a:p>
+          <a:p>
+            <a:r>
+              <a:rPr lang="es-ES" sz="1600" dirty="0">
+                <a:solidFill>
+                  <a:srgbClr val="374151"/>
+                </a:solidFill>
+              </a:rPr>
+              <a:t>En DDD, no modelas solo clases sueltas; modelas reglas de negocio. Un agregado agrupa entidades y </a:t>
+            </a:r>
+            <a:r>
+              <a:rPr lang="es-ES" sz="1600" dirty="0" err="1">
+                <a:solidFill>
+                  <a:srgbClr val="374151"/>
+                </a:solidFill>
+              </a:rPr>
+              <a:t>value</a:t>
+            </a:r>
+            <a:r>
+              <a:rPr lang="es-ES" sz="1600" dirty="0">
+                <a:solidFill>
+                  <a:srgbClr val="374151"/>
+                </a:solidFill>
+              </a:rPr>
+              <a:t> </a:t>
+            </a:r>
+            <a:r>
+              <a:rPr lang="es-ES" sz="1600" dirty="0" err="1">
+                <a:solidFill>
+                  <a:srgbClr val="374151"/>
+                </a:solidFill>
+              </a:rPr>
+              <a:t>objects</a:t>
+            </a:r>
+            <a:r>
+              <a:rPr lang="es-ES" sz="1600" dirty="0">
+                <a:solidFill>
+                  <a:srgbClr val="374151"/>
+                </a:solidFill>
+              </a:rPr>
+              <a:t> que dependen entre sí, y la raíz del agregado es la única puerta de entrada desde fuera.</a:t>
+            </a:r>
+            <a:br>
+              <a:rPr lang="es-ES" sz="1600" dirty="0">
+                <a:solidFill>
+                  <a:srgbClr val="374151"/>
+                </a:solidFill>
+              </a:rPr>
+            </a:br>
+            <a:r>
+              <a:rPr lang="es-ES" sz="1600" dirty="0">
+                <a:solidFill>
+                  <a:srgbClr val="374151"/>
+                </a:solidFill>
+              </a:rPr>
+              <a:t>La razón de existir del agregado es proteger invariantes, es decir, reglas que siempre deben cumplirse. Por ejemplo: “un pedido no puede tener líneas inválidas” o “no puedes modificar una línea de pedido directamente desde fuera”.</a:t>
+            </a:r>
+          </a:p>
+          <a:p>
+            <a:r>
+              <a:rPr lang="es-ES" dirty="0"/>
+              <a:t> </a:t>
+            </a:r>
+          </a:p>
+          <a:p>
+            <a:r>
+              <a:rPr lang="es-ES" sz="1600" b="1" dirty="0">
+                <a:solidFill>
+                  <a:srgbClr val="374151"/>
+                </a:solidFill>
+              </a:rPr>
+              <a:t>Cómo pensarlo fácil</a:t>
+            </a:r>
+          </a:p>
+          <a:p>
+            <a:r>
+              <a:rPr lang="es-ES" sz="1600" dirty="0">
+                <a:solidFill>
+                  <a:srgbClr val="374151"/>
+                </a:solidFill>
+              </a:rPr>
+              <a:t>Imagínate un pedido de una tienda. El pedido tiene líneas de pedido, dirección de envío y quizá descuentos. Todo eso forma una unidad porque tiene sentido cambiarlo junto y porque hay reglas comunes que deben respetarse.</a:t>
+            </a:r>
+            <a:br>
+              <a:rPr lang="es-ES" sz="1600" dirty="0">
+                <a:solidFill>
+                  <a:srgbClr val="374151"/>
+                </a:solidFill>
+              </a:rPr>
+            </a:br>
+            <a:r>
+              <a:rPr lang="es-ES" sz="1600" dirty="0">
+                <a:solidFill>
+                  <a:srgbClr val="374151"/>
+                </a:solidFill>
+              </a:rPr>
+              <a:t>Desde fuera no deberías tocar directamente la lista interna de líneas; en su lugar, llamas a métodos del pedido como AgregarLinea o CambiarDireccion. Así el agregado decide qué está permitido.</a:t>
+            </a:r>
+          </a:p>
+          <a:p>
+            <a:endParaRPr lang="es-ES" sz="1600" dirty="0">
+              <a:solidFill>
+                <a:srgbClr val="374151"/>
+              </a:solidFill>
+            </a:endParaRPr>
+          </a:p>
+          <a:p>
+            <a:endParaRPr lang="es-ES" sz="1600" noProof="0" dirty="0">
+              <a:solidFill>
+                <a:srgbClr val="374151"/>
+              </a:solidFill>
+            </a:endParaRPr>
           </a:p>
         </p:txBody>
       </p:sp>
